--- a/Lab 3.b - Stack Enterprise con Nginx Proxy Manager.pptx
+++ b/Lab 3.b - Stack Enterprise con Nginx Proxy Manager.pptx
@@ -5,10 +5,10 @@
     <p:sldMasterId id="2147483672" r:id="rId4"/>
   </p:sldMasterIdLst>
   <p:notesMasterIdLst>
-    <p:notesMasterId r:id="rId23"/>
+    <p:notesMasterId r:id="rId31"/>
   </p:notesMasterIdLst>
   <p:handoutMasterIdLst>
-    <p:handoutMasterId r:id="rId24"/>
+    <p:handoutMasterId r:id="rId32"/>
   </p:handoutMasterIdLst>
   <p:sldIdLst>
     <p:sldId id="262" r:id="rId5"/>
@@ -27,8 +27,16 @@
     <p:sldId id="270" r:id="rId18"/>
     <p:sldId id="272" r:id="rId19"/>
     <p:sldId id="275" r:id="rId20"/>
-    <p:sldId id="276" r:id="rId21"/>
-    <p:sldId id="261" r:id="rId22"/>
+    <p:sldId id="278" r:id="rId21"/>
+    <p:sldId id="276" r:id="rId22"/>
+    <p:sldId id="279" r:id="rId23"/>
+    <p:sldId id="280" r:id="rId24"/>
+    <p:sldId id="281" r:id="rId25"/>
+    <p:sldId id="282" r:id="rId26"/>
+    <p:sldId id="283" r:id="rId27"/>
+    <p:sldId id="284" r:id="rId28"/>
+    <p:sldId id="285" r:id="rId29"/>
+    <p:sldId id="261" r:id="rId30"/>
   </p:sldIdLst>
   <p:sldSz cx="12192000" cy="6858000"/>
   <p:notesSz cx="6858000" cy="9144000"/>
@@ -1335,6 +1343,114 @@
         <p:cNvPr id="1" name="">
           <a:extLst>
             <a:ext uri="{FF2B5EF4-FFF2-40B4-BE49-F238E27FC236}">
+              <a16:creationId xmlns:a16="http://schemas.microsoft.com/office/drawing/2014/main" id="{A198A602-4B0C-6426-4312-85FDA892B59D}"/>
+            </a:ext>
+          </a:extLst>
+        </p:cNvPr>
+        <p:cNvGrpSpPr/>
+        <p:nvPr/>
+      </p:nvGrpSpPr>
+      <p:grpSpPr>
+        <a:xfrm>
+          <a:off x="0" y="0"/>
+          <a:ext cx="0" cy="0"/>
+          <a:chOff x="0" y="0"/>
+          <a:chExt cx="0" cy="0"/>
+        </a:xfrm>
+      </p:grpSpPr>
+      <p:sp>
+        <p:nvSpPr>
+          <p:cNvPr id="2" name="Segnaposto immagine diapositiva 1">
+            <a:extLst>
+              <a:ext uri="{FF2B5EF4-FFF2-40B4-BE49-F238E27FC236}">
+                <a16:creationId xmlns:a16="http://schemas.microsoft.com/office/drawing/2014/main" id="{39DE0D6D-F2D5-7502-2FAB-7F2EC47BCB5D}"/>
+              </a:ext>
+            </a:extLst>
+          </p:cNvPr>
+          <p:cNvSpPr>
+            <a:spLocks noGrp="1" noRot="1" noChangeAspect="1"/>
+          </p:cNvSpPr>
+          <p:nvPr>
+            <p:ph type="sldImg"/>
+          </p:nvPr>
+        </p:nvSpPr>
+        <p:spPr/>
+      </p:sp>
+      <p:sp>
+        <p:nvSpPr>
+          <p:cNvPr id="3" name="Segnaposto note 2">
+            <a:extLst>
+              <a:ext uri="{FF2B5EF4-FFF2-40B4-BE49-F238E27FC236}">
+                <a16:creationId xmlns:a16="http://schemas.microsoft.com/office/drawing/2014/main" id="{3702377F-019D-7DFF-AE59-3E74DA1124BB}"/>
+              </a:ext>
+            </a:extLst>
+          </p:cNvPr>
+          <p:cNvSpPr>
+            <a:spLocks noGrp="1"/>
+          </p:cNvSpPr>
+          <p:nvPr>
+            <p:ph type="body" idx="1"/>
+          </p:nvPr>
+        </p:nvSpPr>
+        <p:spPr/>
+        <p:txBody>
+          <a:bodyPr/>
+          <a:lstStyle/>
+          <a:p>
+            <a:endParaRPr lang="it-IT" dirty="0"/>
+          </a:p>
+        </p:txBody>
+      </p:sp>
+      <p:sp>
+        <p:nvSpPr>
+          <p:cNvPr id="4" name="Segnaposto numero diapositiva 3">
+            <a:extLst>
+              <a:ext uri="{FF2B5EF4-FFF2-40B4-BE49-F238E27FC236}">
+                <a16:creationId xmlns:a16="http://schemas.microsoft.com/office/drawing/2014/main" id="{EECAB6CF-CE8E-D3CF-3CD4-90A7305D7DC0}"/>
+              </a:ext>
+            </a:extLst>
+          </p:cNvPr>
+          <p:cNvSpPr>
+            <a:spLocks noGrp="1"/>
+          </p:cNvSpPr>
+          <p:nvPr>
+            <p:ph type="sldNum" sz="quarter" idx="5"/>
+          </p:nvPr>
+        </p:nvSpPr>
+        <p:spPr/>
+        <p:txBody>
+          <a:bodyPr/>
+          <a:lstStyle/>
+          <a:p>
+            <a:fld id="{788FDE81-C331-4896-AC61-55381248B14B}" type="slidenum">
+              <a:rPr lang="it-IT" smtClean="0"/>
+              <a:t>17</a:t>
+            </a:fld>
+            <a:endParaRPr lang="it-IT"/>
+          </a:p>
+        </p:txBody>
+      </p:sp>
+    </p:spTree>
+    <p:extLst>
+      <p:ext uri="{BB962C8B-B14F-4D97-AF65-F5344CB8AC3E}">
+        <p14:creationId xmlns:p14="http://schemas.microsoft.com/office/powerpoint/2010/main" val="3873702929"/>
+      </p:ext>
+    </p:extLst>
+  </p:cSld>
+  <p:clrMapOvr>
+    <a:masterClrMapping/>
+  </p:clrMapOvr>
+</p:notes>
+</file>
+
+<file path=ppt/notesSlides/notesSlide16.xml><?xml version="1.0" encoding="utf-8"?>
+<p:notes xmlns:a="http://schemas.openxmlformats.org/drawingml/2006/main" xmlns:r="http://schemas.openxmlformats.org/officeDocument/2006/relationships" xmlns:p="http://schemas.openxmlformats.org/presentationml/2006/main">
+  <p:cSld>
+    <p:spTree>
+      <p:nvGrpSpPr>
+        <p:cNvPr id="1" name="">
+          <a:extLst>
+            <a:ext uri="{FF2B5EF4-FFF2-40B4-BE49-F238E27FC236}">
               <a16:creationId xmlns:a16="http://schemas.microsoft.com/office/drawing/2014/main" id="{3C41A4A6-004A-C9D6-7365-049988264745}"/>
             </a:ext>
           </a:extLst>
@@ -1416,7 +1532,7 @@
           <a:p>
             <a:fld id="{788FDE81-C331-4896-AC61-55381248B14B}" type="slidenum">
               <a:rPr lang="it-IT" smtClean="0"/>
-              <a:t>17</a:t>
+              <a:t>18</a:t>
             </a:fld>
             <a:endParaRPr lang="it-IT"/>
           </a:p>
@@ -1426,6 +1542,330 @@
     <p:extLst>
       <p:ext uri="{BB962C8B-B14F-4D97-AF65-F5344CB8AC3E}">
         <p14:creationId xmlns:p14="http://schemas.microsoft.com/office/powerpoint/2010/main" val="2979441869"/>
+      </p:ext>
+    </p:extLst>
+  </p:cSld>
+  <p:clrMapOvr>
+    <a:masterClrMapping/>
+  </p:clrMapOvr>
+</p:notes>
+</file>
+
+<file path=ppt/notesSlides/notesSlide17.xml><?xml version="1.0" encoding="utf-8"?>
+<p:notes xmlns:a="http://schemas.openxmlformats.org/drawingml/2006/main" xmlns:r="http://schemas.openxmlformats.org/officeDocument/2006/relationships" xmlns:p="http://schemas.openxmlformats.org/presentationml/2006/main">
+  <p:cSld>
+    <p:spTree>
+      <p:nvGrpSpPr>
+        <p:cNvPr id="1" name="">
+          <a:extLst>
+            <a:ext uri="{FF2B5EF4-FFF2-40B4-BE49-F238E27FC236}">
+              <a16:creationId xmlns:a16="http://schemas.microsoft.com/office/drawing/2014/main" id="{CC12F6A7-63EF-457A-6FCC-1FCF55456700}"/>
+            </a:ext>
+          </a:extLst>
+        </p:cNvPr>
+        <p:cNvGrpSpPr/>
+        <p:nvPr/>
+      </p:nvGrpSpPr>
+      <p:grpSpPr>
+        <a:xfrm>
+          <a:off x="0" y="0"/>
+          <a:ext cx="0" cy="0"/>
+          <a:chOff x="0" y="0"/>
+          <a:chExt cx="0" cy="0"/>
+        </a:xfrm>
+      </p:grpSpPr>
+      <p:sp>
+        <p:nvSpPr>
+          <p:cNvPr id="2" name="Segnaposto immagine diapositiva 1">
+            <a:extLst>
+              <a:ext uri="{FF2B5EF4-FFF2-40B4-BE49-F238E27FC236}">
+                <a16:creationId xmlns:a16="http://schemas.microsoft.com/office/drawing/2014/main" id="{AB7A83E7-F8FE-C59C-896F-AA07228136AC}"/>
+              </a:ext>
+            </a:extLst>
+          </p:cNvPr>
+          <p:cNvSpPr>
+            <a:spLocks noGrp="1" noRot="1" noChangeAspect="1"/>
+          </p:cNvSpPr>
+          <p:nvPr>
+            <p:ph type="sldImg"/>
+          </p:nvPr>
+        </p:nvSpPr>
+        <p:spPr/>
+      </p:sp>
+      <p:sp>
+        <p:nvSpPr>
+          <p:cNvPr id="3" name="Segnaposto note 2">
+            <a:extLst>
+              <a:ext uri="{FF2B5EF4-FFF2-40B4-BE49-F238E27FC236}">
+                <a16:creationId xmlns:a16="http://schemas.microsoft.com/office/drawing/2014/main" id="{3A2803F4-056C-E90A-CA21-B3E7FD2BD8D6}"/>
+              </a:ext>
+            </a:extLst>
+          </p:cNvPr>
+          <p:cNvSpPr>
+            <a:spLocks noGrp="1"/>
+          </p:cNvSpPr>
+          <p:nvPr>
+            <p:ph type="body" idx="1"/>
+          </p:nvPr>
+        </p:nvSpPr>
+        <p:spPr/>
+        <p:txBody>
+          <a:bodyPr/>
+          <a:lstStyle/>
+          <a:p>
+            <a:endParaRPr lang="it-IT" dirty="0"/>
+          </a:p>
+        </p:txBody>
+      </p:sp>
+      <p:sp>
+        <p:nvSpPr>
+          <p:cNvPr id="4" name="Segnaposto numero diapositiva 3">
+            <a:extLst>
+              <a:ext uri="{FF2B5EF4-FFF2-40B4-BE49-F238E27FC236}">
+                <a16:creationId xmlns:a16="http://schemas.microsoft.com/office/drawing/2014/main" id="{8E9569BA-9C36-0AC8-07B2-BC7081D68148}"/>
+              </a:ext>
+            </a:extLst>
+          </p:cNvPr>
+          <p:cNvSpPr>
+            <a:spLocks noGrp="1"/>
+          </p:cNvSpPr>
+          <p:nvPr>
+            <p:ph type="sldNum" sz="quarter" idx="5"/>
+          </p:nvPr>
+        </p:nvSpPr>
+        <p:spPr/>
+        <p:txBody>
+          <a:bodyPr/>
+          <a:lstStyle/>
+          <a:p>
+            <a:fld id="{788FDE81-C331-4896-AC61-55381248B14B}" type="slidenum">
+              <a:rPr lang="it-IT" smtClean="0"/>
+              <a:t>19</a:t>
+            </a:fld>
+            <a:endParaRPr lang="it-IT"/>
+          </a:p>
+        </p:txBody>
+      </p:sp>
+    </p:spTree>
+    <p:extLst>
+      <p:ext uri="{BB962C8B-B14F-4D97-AF65-F5344CB8AC3E}">
+        <p14:creationId xmlns:p14="http://schemas.microsoft.com/office/powerpoint/2010/main" val="3485025772"/>
+      </p:ext>
+    </p:extLst>
+  </p:cSld>
+  <p:clrMapOvr>
+    <a:masterClrMapping/>
+  </p:clrMapOvr>
+</p:notes>
+</file>
+
+<file path=ppt/notesSlides/notesSlide18.xml><?xml version="1.0" encoding="utf-8"?>
+<p:notes xmlns:a="http://schemas.openxmlformats.org/drawingml/2006/main" xmlns:r="http://schemas.openxmlformats.org/officeDocument/2006/relationships" xmlns:p="http://schemas.openxmlformats.org/presentationml/2006/main">
+  <p:cSld>
+    <p:spTree>
+      <p:nvGrpSpPr>
+        <p:cNvPr id="1" name="">
+          <a:extLst>
+            <a:ext uri="{FF2B5EF4-FFF2-40B4-BE49-F238E27FC236}">
+              <a16:creationId xmlns:a16="http://schemas.microsoft.com/office/drawing/2014/main" id="{B2D6584D-4122-C210-D299-6EF05357AF13}"/>
+            </a:ext>
+          </a:extLst>
+        </p:cNvPr>
+        <p:cNvGrpSpPr/>
+        <p:nvPr/>
+      </p:nvGrpSpPr>
+      <p:grpSpPr>
+        <a:xfrm>
+          <a:off x="0" y="0"/>
+          <a:ext cx="0" cy="0"/>
+          <a:chOff x="0" y="0"/>
+          <a:chExt cx="0" cy="0"/>
+        </a:xfrm>
+      </p:grpSpPr>
+      <p:sp>
+        <p:nvSpPr>
+          <p:cNvPr id="2" name="Segnaposto immagine diapositiva 1">
+            <a:extLst>
+              <a:ext uri="{FF2B5EF4-FFF2-40B4-BE49-F238E27FC236}">
+                <a16:creationId xmlns:a16="http://schemas.microsoft.com/office/drawing/2014/main" id="{DEED87AF-F4ED-D9D5-BDD7-69356F56E297}"/>
+              </a:ext>
+            </a:extLst>
+          </p:cNvPr>
+          <p:cNvSpPr>
+            <a:spLocks noGrp="1" noRot="1" noChangeAspect="1"/>
+          </p:cNvSpPr>
+          <p:nvPr>
+            <p:ph type="sldImg"/>
+          </p:nvPr>
+        </p:nvSpPr>
+        <p:spPr/>
+      </p:sp>
+      <p:sp>
+        <p:nvSpPr>
+          <p:cNvPr id="3" name="Segnaposto note 2">
+            <a:extLst>
+              <a:ext uri="{FF2B5EF4-FFF2-40B4-BE49-F238E27FC236}">
+                <a16:creationId xmlns:a16="http://schemas.microsoft.com/office/drawing/2014/main" id="{04FFBBE0-0673-BB34-EE82-B2096E20C0BD}"/>
+              </a:ext>
+            </a:extLst>
+          </p:cNvPr>
+          <p:cNvSpPr>
+            <a:spLocks noGrp="1"/>
+          </p:cNvSpPr>
+          <p:nvPr>
+            <p:ph type="body" idx="1"/>
+          </p:nvPr>
+        </p:nvSpPr>
+        <p:spPr/>
+        <p:txBody>
+          <a:bodyPr/>
+          <a:lstStyle/>
+          <a:p>
+            <a:endParaRPr lang="it-IT" dirty="0"/>
+          </a:p>
+        </p:txBody>
+      </p:sp>
+      <p:sp>
+        <p:nvSpPr>
+          <p:cNvPr id="4" name="Segnaposto numero diapositiva 3">
+            <a:extLst>
+              <a:ext uri="{FF2B5EF4-FFF2-40B4-BE49-F238E27FC236}">
+                <a16:creationId xmlns:a16="http://schemas.microsoft.com/office/drawing/2014/main" id="{255F0AA8-7A83-2435-84B3-89315E727B7E}"/>
+              </a:ext>
+            </a:extLst>
+          </p:cNvPr>
+          <p:cNvSpPr>
+            <a:spLocks noGrp="1"/>
+          </p:cNvSpPr>
+          <p:nvPr>
+            <p:ph type="sldNum" sz="quarter" idx="5"/>
+          </p:nvPr>
+        </p:nvSpPr>
+        <p:spPr/>
+        <p:txBody>
+          <a:bodyPr/>
+          <a:lstStyle/>
+          <a:p>
+            <a:fld id="{788FDE81-C331-4896-AC61-55381248B14B}" type="slidenum">
+              <a:rPr lang="it-IT" smtClean="0"/>
+              <a:t>20</a:t>
+            </a:fld>
+            <a:endParaRPr lang="it-IT"/>
+          </a:p>
+        </p:txBody>
+      </p:sp>
+    </p:spTree>
+    <p:extLst>
+      <p:ext uri="{BB962C8B-B14F-4D97-AF65-F5344CB8AC3E}">
+        <p14:creationId xmlns:p14="http://schemas.microsoft.com/office/powerpoint/2010/main" val="1868553767"/>
+      </p:ext>
+    </p:extLst>
+  </p:cSld>
+  <p:clrMapOvr>
+    <a:masterClrMapping/>
+  </p:clrMapOvr>
+</p:notes>
+</file>
+
+<file path=ppt/notesSlides/notesSlide19.xml><?xml version="1.0" encoding="utf-8"?>
+<p:notes xmlns:a="http://schemas.openxmlformats.org/drawingml/2006/main" xmlns:r="http://schemas.openxmlformats.org/officeDocument/2006/relationships" xmlns:p="http://schemas.openxmlformats.org/presentationml/2006/main">
+  <p:cSld>
+    <p:spTree>
+      <p:nvGrpSpPr>
+        <p:cNvPr id="1" name="">
+          <a:extLst>
+            <a:ext uri="{FF2B5EF4-FFF2-40B4-BE49-F238E27FC236}">
+              <a16:creationId xmlns:a16="http://schemas.microsoft.com/office/drawing/2014/main" id="{AF49761A-8405-1518-4862-2753DF48BE9A}"/>
+            </a:ext>
+          </a:extLst>
+        </p:cNvPr>
+        <p:cNvGrpSpPr/>
+        <p:nvPr/>
+      </p:nvGrpSpPr>
+      <p:grpSpPr>
+        <a:xfrm>
+          <a:off x="0" y="0"/>
+          <a:ext cx="0" cy="0"/>
+          <a:chOff x="0" y="0"/>
+          <a:chExt cx="0" cy="0"/>
+        </a:xfrm>
+      </p:grpSpPr>
+      <p:sp>
+        <p:nvSpPr>
+          <p:cNvPr id="2" name="Segnaposto immagine diapositiva 1">
+            <a:extLst>
+              <a:ext uri="{FF2B5EF4-FFF2-40B4-BE49-F238E27FC236}">
+                <a16:creationId xmlns:a16="http://schemas.microsoft.com/office/drawing/2014/main" id="{4CA89D45-FAC0-747B-C525-37FA080815B4}"/>
+              </a:ext>
+            </a:extLst>
+          </p:cNvPr>
+          <p:cNvSpPr>
+            <a:spLocks noGrp="1" noRot="1" noChangeAspect="1"/>
+          </p:cNvSpPr>
+          <p:nvPr>
+            <p:ph type="sldImg"/>
+          </p:nvPr>
+        </p:nvSpPr>
+        <p:spPr/>
+      </p:sp>
+      <p:sp>
+        <p:nvSpPr>
+          <p:cNvPr id="3" name="Segnaposto note 2">
+            <a:extLst>
+              <a:ext uri="{FF2B5EF4-FFF2-40B4-BE49-F238E27FC236}">
+                <a16:creationId xmlns:a16="http://schemas.microsoft.com/office/drawing/2014/main" id="{61749DE6-4911-861B-1E4E-3AC1B309BCC4}"/>
+              </a:ext>
+            </a:extLst>
+          </p:cNvPr>
+          <p:cNvSpPr>
+            <a:spLocks noGrp="1"/>
+          </p:cNvSpPr>
+          <p:nvPr>
+            <p:ph type="body" idx="1"/>
+          </p:nvPr>
+        </p:nvSpPr>
+        <p:spPr/>
+        <p:txBody>
+          <a:bodyPr/>
+          <a:lstStyle/>
+          <a:p>
+            <a:endParaRPr lang="it-IT" dirty="0"/>
+          </a:p>
+        </p:txBody>
+      </p:sp>
+      <p:sp>
+        <p:nvSpPr>
+          <p:cNvPr id="4" name="Segnaposto numero diapositiva 3">
+            <a:extLst>
+              <a:ext uri="{FF2B5EF4-FFF2-40B4-BE49-F238E27FC236}">
+                <a16:creationId xmlns:a16="http://schemas.microsoft.com/office/drawing/2014/main" id="{AD915580-EE69-CA43-252D-F353759EB256}"/>
+              </a:ext>
+            </a:extLst>
+          </p:cNvPr>
+          <p:cNvSpPr>
+            <a:spLocks noGrp="1"/>
+          </p:cNvSpPr>
+          <p:nvPr>
+            <p:ph type="sldNum" sz="quarter" idx="5"/>
+          </p:nvPr>
+        </p:nvSpPr>
+        <p:spPr/>
+        <p:txBody>
+          <a:bodyPr/>
+          <a:lstStyle/>
+          <a:p>
+            <a:fld id="{788FDE81-C331-4896-AC61-55381248B14B}" type="slidenum">
+              <a:rPr lang="it-IT" smtClean="0"/>
+              <a:t>21</a:t>
+            </a:fld>
+            <a:endParaRPr lang="it-IT"/>
+          </a:p>
+        </p:txBody>
+      </p:sp>
+    </p:spTree>
+    <p:extLst>
+      <p:ext uri="{BB962C8B-B14F-4D97-AF65-F5344CB8AC3E}">
+        <p14:creationId xmlns:p14="http://schemas.microsoft.com/office/powerpoint/2010/main" val="1233130206"/>
       </p:ext>
     </p:extLst>
   </p:cSld>
@@ -1510,6 +1950,438 @@
     <p:extLst>
       <p:ext uri="{BB962C8B-B14F-4D97-AF65-F5344CB8AC3E}">
         <p14:creationId xmlns:p14="http://schemas.microsoft.com/office/powerpoint/2010/main" val="18396159"/>
+      </p:ext>
+    </p:extLst>
+  </p:cSld>
+  <p:clrMapOvr>
+    <a:masterClrMapping/>
+  </p:clrMapOvr>
+</p:notes>
+</file>
+
+<file path=ppt/notesSlides/notesSlide20.xml><?xml version="1.0" encoding="utf-8"?>
+<p:notes xmlns:a="http://schemas.openxmlformats.org/drawingml/2006/main" xmlns:r="http://schemas.openxmlformats.org/officeDocument/2006/relationships" xmlns:p="http://schemas.openxmlformats.org/presentationml/2006/main">
+  <p:cSld>
+    <p:spTree>
+      <p:nvGrpSpPr>
+        <p:cNvPr id="1" name="">
+          <a:extLst>
+            <a:ext uri="{FF2B5EF4-FFF2-40B4-BE49-F238E27FC236}">
+              <a16:creationId xmlns:a16="http://schemas.microsoft.com/office/drawing/2014/main" id="{4AC5B52C-8EAB-5985-A2D5-5E2E51CD869F}"/>
+            </a:ext>
+          </a:extLst>
+        </p:cNvPr>
+        <p:cNvGrpSpPr/>
+        <p:nvPr/>
+      </p:nvGrpSpPr>
+      <p:grpSpPr>
+        <a:xfrm>
+          <a:off x="0" y="0"/>
+          <a:ext cx="0" cy="0"/>
+          <a:chOff x="0" y="0"/>
+          <a:chExt cx="0" cy="0"/>
+        </a:xfrm>
+      </p:grpSpPr>
+      <p:sp>
+        <p:nvSpPr>
+          <p:cNvPr id="2" name="Segnaposto immagine diapositiva 1">
+            <a:extLst>
+              <a:ext uri="{FF2B5EF4-FFF2-40B4-BE49-F238E27FC236}">
+                <a16:creationId xmlns:a16="http://schemas.microsoft.com/office/drawing/2014/main" id="{CB3ACA92-D7E6-112A-2057-55C70A36F89D}"/>
+              </a:ext>
+            </a:extLst>
+          </p:cNvPr>
+          <p:cNvSpPr>
+            <a:spLocks noGrp="1" noRot="1" noChangeAspect="1"/>
+          </p:cNvSpPr>
+          <p:nvPr>
+            <p:ph type="sldImg"/>
+          </p:nvPr>
+        </p:nvSpPr>
+        <p:spPr/>
+      </p:sp>
+      <p:sp>
+        <p:nvSpPr>
+          <p:cNvPr id="3" name="Segnaposto note 2">
+            <a:extLst>
+              <a:ext uri="{FF2B5EF4-FFF2-40B4-BE49-F238E27FC236}">
+                <a16:creationId xmlns:a16="http://schemas.microsoft.com/office/drawing/2014/main" id="{AB8E9E9C-D330-D24E-C33A-CBD4CEE3ADBF}"/>
+              </a:ext>
+            </a:extLst>
+          </p:cNvPr>
+          <p:cNvSpPr>
+            <a:spLocks noGrp="1"/>
+          </p:cNvSpPr>
+          <p:nvPr>
+            <p:ph type="body" idx="1"/>
+          </p:nvPr>
+        </p:nvSpPr>
+        <p:spPr/>
+        <p:txBody>
+          <a:bodyPr/>
+          <a:lstStyle/>
+          <a:p>
+            <a:endParaRPr lang="it-IT" dirty="0"/>
+          </a:p>
+        </p:txBody>
+      </p:sp>
+      <p:sp>
+        <p:nvSpPr>
+          <p:cNvPr id="4" name="Segnaposto numero diapositiva 3">
+            <a:extLst>
+              <a:ext uri="{FF2B5EF4-FFF2-40B4-BE49-F238E27FC236}">
+                <a16:creationId xmlns:a16="http://schemas.microsoft.com/office/drawing/2014/main" id="{B6C4B2EC-7A38-5760-0032-464579396D11}"/>
+              </a:ext>
+            </a:extLst>
+          </p:cNvPr>
+          <p:cNvSpPr>
+            <a:spLocks noGrp="1"/>
+          </p:cNvSpPr>
+          <p:nvPr>
+            <p:ph type="sldNum" sz="quarter" idx="5"/>
+          </p:nvPr>
+        </p:nvSpPr>
+        <p:spPr/>
+        <p:txBody>
+          <a:bodyPr/>
+          <a:lstStyle/>
+          <a:p>
+            <a:fld id="{788FDE81-C331-4896-AC61-55381248B14B}" type="slidenum">
+              <a:rPr lang="it-IT" smtClean="0"/>
+              <a:t>22</a:t>
+            </a:fld>
+            <a:endParaRPr lang="it-IT"/>
+          </a:p>
+        </p:txBody>
+      </p:sp>
+    </p:spTree>
+    <p:extLst>
+      <p:ext uri="{BB962C8B-B14F-4D97-AF65-F5344CB8AC3E}">
+        <p14:creationId xmlns:p14="http://schemas.microsoft.com/office/powerpoint/2010/main" val="2935908252"/>
+      </p:ext>
+    </p:extLst>
+  </p:cSld>
+  <p:clrMapOvr>
+    <a:masterClrMapping/>
+  </p:clrMapOvr>
+</p:notes>
+</file>
+
+<file path=ppt/notesSlides/notesSlide21.xml><?xml version="1.0" encoding="utf-8"?>
+<p:notes xmlns:a="http://schemas.openxmlformats.org/drawingml/2006/main" xmlns:r="http://schemas.openxmlformats.org/officeDocument/2006/relationships" xmlns:p="http://schemas.openxmlformats.org/presentationml/2006/main">
+  <p:cSld>
+    <p:spTree>
+      <p:nvGrpSpPr>
+        <p:cNvPr id="1" name="">
+          <a:extLst>
+            <a:ext uri="{FF2B5EF4-FFF2-40B4-BE49-F238E27FC236}">
+              <a16:creationId xmlns:a16="http://schemas.microsoft.com/office/drawing/2014/main" id="{402588C1-6727-60A9-0C50-EED0FFBD0042}"/>
+            </a:ext>
+          </a:extLst>
+        </p:cNvPr>
+        <p:cNvGrpSpPr/>
+        <p:nvPr/>
+      </p:nvGrpSpPr>
+      <p:grpSpPr>
+        <a:xfrm>
+          <a:off x="0" y="0"/>
+          <a:ext cx="0" cy="0"/>
+          <a:chOff x="0" y="0"/>
+          <a:chExt cx="0" cy="0"/>
+        </a:xfrm>
+      </p:grpSpPr>
+      <p:sp>
+        <p:nvSpPr>
+          <p:cNvPr id="2" name="Segnaposto immagine diapositiva 1">
+            <a:extLst>
+              <a:ext uri="{FF2B5EF4-FFF2-40B4-BE49-F238E27FC236}">
+                <a16:creationId xmlns:a16="http://schemas.microsoft.com/office/drawing/2014/main" id="{1E7B27AE-6B82-B5B8-8C5D-E83FBC2D17DB}"/>
+              </a:ext>
+            </a:extLst>
+          </p:cNvPr>
+          <p:cNvSpPr>
+            <a:spLocks noGrp="1" noRot="1" noChangeAspect="1"/>
+          </p:cNvSpPr>
+          <p:nvPr>
+            <p:ph type="sldImg"/>
+          </p:nvPr>
+        </p:nvSpPr>
+        <p:spPr/>
+      </p:sp>
+      <p:sp>
+        <p:nvSpPr>
+          <p:cNvPr id="3" name="Segnaposto note 2">
+            <a:extLst>
+              <a:ext uri="{FF2B5EF4-FFF2-40B4-BE49-F238E27FC236}">
+                <a16:creationId xmlns:a16="http://schemas.microsoft.com/office/drawing/2014/main" id="{62958EAA-746D-DDED-9C47-BE4554EF9635}"/>
+              </a:ext>
+            </a:extLst>
+          </p:cNvPr>
+          <p:cNvSpPr>
+            <a:spLocks noGrp="1"/>
+          </p:cNvSpPr>
+          <p:nvPr>
+            <p:ph type="body" idx="1"/>
+          </p:nvPr>
+        </p:nvSpPr>
+        <p:spPr/>
+        <p:txBody>
+          <a:bodyPr/>
+          <a:lstStyle/>
+          <a:p>
+            <a:endParaRPr lang="it-IT" dirty="0"/>
+          </a:p>
+        </p:txBody>
+      </p:sp>
+      <p:sp>
+        <p:nvSpPr>
+          <p:cNvPr id="4" name="Segnaposto numero diapositiva 3">
+            <a:extLst>
+              <a:ext uri="{FF2B5EF4-FFF2-40B4-BE49-F238E27FC236}">
+                <a16:creationId xmlns:a16="http://schemas.microsoft.com/office/drawing/2014/main" id="{53C4C417-69CA-259D-8972-CAD650ED7974}"/>
+              </a:ext>
+            </a:extLst>
+          </p:cNvPr>
+          <p:cNvSpPr>
+            <a:spLocks noGrp="1"/>
+          </p:cNvSpPr>
+          <p:nvPr>
+            <p:ph type="sldNum" sz="quarter" idx="5"/>
+          </p:nvPr>
+        </p:nvSpPr>
+        <p:spPr/>
+        <p:txBody>
+          <a:bodyPr/>
+          <a:lstStyle/>
+          <a:p>
+            <a:fld id="{788FDE81-C331-4896-AC61-55381248B14B}" type="slidenum">
+              <a:rPr lang="it-IT" smtClean="0"/>
+              <a:t>23</a:t>
+            </a:fld>
+            <a:endParaRPr lang="it-IT"/>
+          </a:p>
+        </p:txBody>
+      </p:sp>
+    </p:spTree>
+    <p:extLst>
+      <p:ext uri="{BB962C8B-B14F-4D97-AF65-F5344CB8AC3E}">
+        <p14:creationId xmlns:p14="http://schemas.microsoft.com/office/powerpoint/2010/main" val="829668727"/>
+      </p:ext>
+    </p:extLst>
+  </p:cSld>
+  <p:clrMapOvr>
+    <a:masterClrMapping/>
+  </p:clrMapOvr>
+</p:notes>
+</file>
+
+<file path=ppt/notesSlides/notesSlide22.xml><?xml version="1.0" encoding="utf-8"?>
+<p:notes xmlns:a="http://schemas.openxmlformats.org/drawingml/2006/main" xmlns:r="http://schemas.openxmlformats.org/officeDocument/2006/relationships" xmlns:p="http://schemas.openxmlformats.org/presentationml/2006/main">
+  <p:cSld>
+    <p:spTree>
+      <p:nvGrpSpPr>
+        <p:cNvPr id="1" name="">
+          <a:extLst>
+            <a:ext uri="{FF2B5EF4-FFF2-40B4-BE49-F238E27FC236}">
+              <a16:creationId xmlns:a16="http://schemas.microsoft.com/office/drawing/2014/main" id="{39F67E0B-A50F-848C-3176-58076ED3FD9F}"/>
+            </a:ext>
+          </a:extLst>
+        </p:cNvPr>
+        <p:cNvGrpSpPr/>
+        <p:nvPr/>
+      </p:nvGrpSpPr>
+      <p:grpSpPr>
+        <a:xfrm>
+          <a:off x="0" y="0"/>
+          <a:ext cx="0" cy="0"/>
+          <a:chOff x="0" y="0"/>
+          <a:chExt cx="0" cy="0"/>
+        </a:xfrm>
+      </p:grpSpPr>
+      <p:sp>
+        <p:nvSpPr>
+          <p:cNvPr id="2" name="Segnaposto immagine diapositiva 1">
+            <a:extLst>
+              <a:ext uri="{FF2B5EF4-FFF2-40B4-BE49-F238E27FC236}">
+                <a16:creationId xmlns:a16="http://schemas.microsoft.com/office/drawing/2014/main" id="{632D3A44-F1D8-05CF-D2ED-A2DEE6744689}"/>
+              </a:ext>
+            </a:extLst>
+          </p:cNvPr>
+          <p:cNvSpPr>
+            <a:spLocks noGrp="1" noRot="1" noChangeAspect="1"/>
+          </p:cNvSpPr>
+          <p:nvPr>
+            <p:ph type="sldImg"/>
+          </p:nvPr>
+        </p:nvSpPr>
+        <p:spPr/>
+      </p:sp>
+      <p:sp>
+        <p:nvSpPr>
+          <p:cNvPr id="3" name="Segnaposto note 2">
+            <a:extLst>
+              <a:ext uri="{FF2B5EF4-FFF2-40B4-BE49-F238E27FC236}">
+                <a16:creationId xmlns:a16="http://schemas.microsoft.com/office/drawing/2014/main" id="{761D85C5-D9E8-E096-7D6D-3F0307E44FC9}"/>
+              </a:ext>
+            </a:extLst>
+          </p:cNvPr>
+          <p:cNvSpPr>
+            <a:spLocks noGrp="1"/>
+          </p:cNvSpPr>
+          <p:nvPr>
+            <p:ph type="body" idx="1"/>
+          </p:nvPr>
+        </p:nvSpPr>
+        <p:spPr/>
+        <p:txBody>
+          <a:bodyPr/>
+          <a:lstStyle/>
+          <a:p>
+            <a:endParaRPr lang="it-IT" dirty="0"/>
+          </a:p>
+        </p:txBody>
+      </p:sp>
+      <p:sp>
+        <p:nvSpPr>
+          <p:cNvPr id="4" name="Segnaposto numero diapositiva 3">
+            <a:extLst>
+              <a:ext uri="{FF2B5EF4-FFF2-40B4-BE49-F238E27FC236}">
+                <a16:creationId xmlns:a16="http://schemas.microsoft.com/office/drawing/2014/main" id="{A90CAD8A-61EA-E875-59D8-6CC15915A9F1}"/>
+              </a:ext>
+            </a:extLst>
+          </p:cNvPr>
+          <p:cNvSpPr>
+            <a:spLocks noGrp="1"/>
+          </p:cNvSpPr>
+          <p:nvPr>
+            <p:ph type="sldNum" sz="quarter" idx="5"/>
+          </p:nvPr>
+        </p:nvSpPr>
+        <p:spPr/>
+        <p:txBody>
+          <a:bodyPr/>
+          <a:lstStyle/>
+          <a:p>
+            <a:fld id="{788FDE81-C331-4896-AC61-55381248B14B}" type="slidenum">
+              <a:rPr lang="it-IT" smtClean="0"/>
+              <a:t>24</a:t>
+            </a:fld>
+            <a:endParaRPr lang="it-IT"/>
+          </a:p>
+        </p:txBody>
+      </p:sp>
+    </p:spTree>
+    <p:extLst>
+      <p:ext uri="{BB962C8B-B14F-4D97-AF65-F5344CB8AC3E}">
+        <p14:creationId xmlns:p14="http://schemas.microsoft.com/office/powerpoint/2010/main" val="1542913006"/>
+      </p:ext>
+    </p:extLst>
+  </p:cSld>
+  <p:clrMapOvr>
+    <a:masterClrMapping/>
+  </p:clrMapOvr>
+</p:notes>
+</file>
+
+<file path=ppt/notesSlides/notesSlide23.xml><?xml version="1.0" encoding="utf-8"?>
+<p:notes xmlns:a="http://schemas.openxmlformats.org/drawingml/2006/main" xmlns:r="http://schemas.openxmlformats.org/officeDocument/2006/relationships" xmlns:p="http://schemas.openxmlformats.org/presentationml/2006/main">
+  <p:cSld>
+    <p:spTree>
+      <p:nvGrpSpPr>
+        <p:cNvPr id="1" name="">
+          <a:extLst>
+            <a:ext uri="{FF2B5EF4-FFF2-40B4-BE49-F238E27FC236}">
+              <a16:creationId xmlns:a16="http://schemas.microsoft.com/office/drawing/2014/main" id="{E033C7E6-30B7-66A9-8B71-7601E2D95E0E}"/>
+            </a:ext>
+          </a:extLst>
+        </p:cNvPr>
+        <p:cNvGrpSpPr/>
+        <p:nvPr/>
+      </p:nvGrpSpPr>
+      <p:grpSpPr>
+        <a:xfrm>
+          <a:off x="0" y="0"/>
+          <a:ext cx="0" cy="0"/>
+          <a:chOff x="0" y="0"/>
+          <a:chExt cx="0" cy="0"/>
+        </a:xfrm>
+      </p:grpSpPr>
+      <p:sp>
+        <p:nvSpPr>
+          <p:cNvPr id="2" name="Segnaposto immagine diapositiva 1">
+            <a:extLst>
+              <a:ext uri="{FF2B5EF4-FFF2-40B4-BE49-F238E27FC236}">
+                <a16:creationId xmlns:a16="http://schemas.microsoft.com/office/drawing/2014/main" id="{6919CBCD-6093-853D-4ECB-8C4B62331E29}"/>
+              </a:ext>
+            </a:extLst>
+          </p:cNvPr>
+          <p:cNvSpPr>
+            <a:spLocks noGrp="1" noRot="1" noChangeAspect="1"/>
+          </p:cNvSpPr>
+          <p:nvPr>
+            <p:ph type="sldImg"/>
+          </p:nvPr>
+        </p:nvSpPr>
+        <p:spPr/>
+      </p:sp>
+      <p:sp>
+        <p:nvSpPr>
+          <p:cNvPr id="3" name="Segnaposto note 2">
+            <a:extLst>
+              <a:ext uri="{FF2B5EF4-FFF2-40B4-BE49-F238E27FC236}">
+                <a16:creationId xmlns:a16="http://schemas.microsoft.com/office/drawing/2014/main" id="{C21EF958-E5DB-75C3-268A-1D53DAB4D4DB}"/>
+              </a:ext>
+            </a:extLst>
+          </p:cNvPr>
+          <p:cNvSpPr>
+            <a:spLocks noGrp="1"/>
+          </p:cNvSpPr>
+          <p:nvPr>
+            <p:ph type="body" idx="1"/>
+          </p:nvPr>
+        </p:nvSpPr>
+        <p:spPr/>
+        <p:txBody>
+          <a:bodyPr/>
+          <a:lstStyle/>
+          <a:p>
+            <a:endParaRPr lang="it-IT" dirty="0"/>
+          </a:p>
+        </p:txBody>
+      </p:sp>
+      <p:sp>
+        <p:nvSpPr>
+          <p:cNvPr id="4" name="Segnaposto numero diapositiva 3">
+            <a:extLst>
+              <a:ext uri="{FF2B5EF4-FFF2-40B4-BE49-F238E27FC236}">
+                <a16:creationId xmlns:a16="http://schemas.microsoft.com/office/drawing/2014/main" id="{06266C65-1806-0F7A-CF15-4CA438C43EE0}"/>
+              </a:ext>
+            </a:extLst>
+          </p:cNvPr>
+          <p:cNvSpPr>
+            <a:spLocks noGrp="1"/>
+          </p:cNvSpPr>
+          <p:nvPr>
+            <p:ph type="sldNum" sz="quarter" idx="5"/>
+          </p:nvPr>
+        </p:nvSpPr>
+        <p:spPr/>
+        <p:txBody>
+          <a:bodyPr/>
+          <a:lstStyle/>
+          <a:p>
+            <a:fld id="{788FDE81-C331-4896-AC61-55381248B14B}" type="slidenum">
+              <a:rPr lang="it-IT" smtClean="0"/>
+              <a:t>25</a:t>
+            </a:fld>
+            <a:endParaRPr lang="it-IT"/>
+          </a:p>
+        </p:txBody>
+      </p:sp>
+    </p:spTree>
+    <p:extLst>
+      <p:ext uri="{BB962C8B-B14F-4D97-AF65-F5344CB8AC3E}">
+        <p14:creationId xmlns:p14="http://schemas.microsoft.com/office/powerpoint/2010/main" val="1994148899"/>
       </p:ext>
     </p:extLst>
   </p:cSld>
@@ -2414,13 +3286,13 @@
           <p:nvPr userDrawn="1"/>
         </p:nvPicPr>
         <p:blipFill>
-          <a:blip>
+          <a:blip r:embed="rId3">
             <a:extLst>
               <a:ext uri="{28A0092B-C50C-407E-A947-70E740481C1C}">
                 <a14:useLocalDpi xmlns:a14="http://schemas.microsoft.com/office/drawing/2010/main" val="0"/>
               </a:ext>
               <a:ext uri="{96DAC541-7B7A-43D3-8B79-37D633B846F1}">
-                <asvg:svgBlip xmlns:asvg="http://schemas.microsoft.com/office/drawing/2016/SVG/main" r:embed="rId3"/>
+                <asvg:svgBlip xmlns:asvg="http://schemas.microsoft.com/office/drawing/2016/SVG/main" r:embed="rId4"/>
               </a:ext>
             </a:extLst>
           </a:blip>
@@ -2891,14 +3763,14 @@
           <p:nvPr userDrawn="1"/>
         </p:nvPicPr>
         <p:blipFill>
-          <a:blip>
+          <a:blip r:embed="rId4">
             <a:lum bright="100000"/>
             <a:extLst>
               <a:ext uri="{28A0092B-C50C-407E-A947-70E740481C1C}">
                 <a14:useLocalDpi xmlns:a14="http://schemas.microsoft.com/office/drawing/2010/main" val="0"/>
               </a:ext>
               <a:ext uri="{96DAC541-7B7A-43D3-8B79-37D633B846F1}">
-                <asvg:svgBlip xmlns:asvg="http://schemas.microsoft.com/office/drawing/2016/SVG/main" r:embed="rId4"/>
+                <asvg:svgBlip xmlns:asvg="http://schemas.microsoft.com/office/drawing/2016/SVG/main" r:embed="rId5"/>
               </a:ext>
             </a:extLst>
           </a:blip>
@@ -2975,7 +3847,7 @@
           <p:nvPr userDrawn="1"/>
         </p:nvPicPr>
         <p:blipFill rotWithShape="1">
-          <a:blip r:embed="rId5" cstate="print"/>
+          <a:blip r:embed="rId6" cstate="print"/>
           <a:srcRect l="1386" t="187" r="342" b="95555"/>
           <a:stretch/>
         </p:blipFill>
@@ -3272,13 +4144,13 @@
           <p:nvPr userDrawn="1"/>
         </p:nvPicPr>
         <p:blipFill>
-          <a:blip>
+          <a:blip r:embed="rId2">
             <a:extLst>
               <a:ext uri="{28A0092B-C50C-407E-A947-70E740481C1C}">
                 <a14:useLocalDpi xmlns:a14="http://schemas.microsoft.com/office/drawing/2010/main" val="0"/>
               </a:ext>
               <a:ext uri="{96DAC541-7B7A-43D3-8B79-37D633B846F1}">
-                <asvg:svgBlip xmlns:asvg="http://schemas.microsoft.com/office/drawing/2016/SVG/main" r:embed="rId2"/>
+                <asvg:svgBlip xmlns:asvg="http://schemas.microsoft.com/office/drawing/2016/SVG/main" r:embed="rId3"/>
               </a:ext>
             </a:extLst>
           </a:blip>
@@ -3638,13 +4510,13 @@
           <p:nvPr userDrawn="1"/>
         </p:nvPicPr>
         <p:blipFill>
-          <a:blip>
+          <a:blip r:embed="rId2">
             <a:extLst>
               <a:ext uri="{28A0092B-C50C-407E-A947-70E740481C1C}">
                 <a14:useLocalDpi xmlns:a14="http://schemas.microsoft.com/office/drawing/2010/main" val="0"/>
               </a:ext>
               <a:ext uri="{96DAC541-7B7A-43D3-8B79-37D633B846F1}">
-                <asvg:svgBlip xmlns:asvg="http://schemas.microsoft.com/office/drawing/2016/SVG/main" r:embed="rId2"/>
+                <asvg:svgBlip xmlns:asvg="http://schemas.microsoft.com/office/drawing/2016/SVG/main" r:embed="rId3"/>
               </a:ext>
             </a:extLst>
           </a:blip>
@@ -3944,13 +4816,13 @@
           <p:nvPr userDrawn="1"/>
         </p:nvPicPr>
         <p:blipFill>
-          <a:blip>
+          <a:blip r:embed="rId3">
             <a:extLst>
               <a:ext uri="{28A0092B-C50C-407E-A947-70E740481C1C}">
                 <a14:useLocalDpi xmlns:a14="http://schemas.microsoft.com/office/drawing/2010/main" val="0"/>
               </a:ext>
               <a:ext uri="{96DAC541-7B7A-43D3-8B79-37D633B846F1}">
-                <asvg:svgBlip xmlns:asvg="http://schemas.microsoft.com/office/drawing/2016/SVG/main" r:embed="rId3"/>
+                <asvg:svgBlip xmlns:asvg="http://schemas.microsoft.com/office/drawing/2016/SVG/main" r:embed="rId4"/>
               </a:ext>
             </a:extLst>
           </a:blip>
@@ -4295,13 +5167,13 @@
           <p:nvPr userDrawn="1"/>
         </p:nvPicPr>
         <p:blipFill>
-          <a:blip>
+          <a:blip r:embed="rId3">
             <a:extLst>
               <a:ext uri="{28A0092B-C50C-407E-A947-70E740481C1C}">
                 <a14:useLocalDpi xmlns:a14="http://schemas.microsoft.com/office/drawing/2010/main" val="0"/>
               </a:ext>
               <a:ext uri="{96DAC541-7B7A-43D3-8B79-37D633B846F1}">
-                <asvg:svgBlip xmlns:asvg="http://schemas.microsoft.com/office/drawing/2016/SVG/main" r:embed="rId3"/>
+                <asvg:svgBlip xmlns:asvg="http://schemas.microsoft.com/office/drawing/2016/SVG/main" r:embed="rId4"/>
               </a:ext>
             </a:extLst>
           </a:blip>
@@ -4568,13 +5440,13 @@
           <p:nvPr userDrawn="1"/>
         </p:nvPicPr>
         <p:blipFill>
-          <a:blip>
+          <a:blip r:embed="rId9">
             <a:extLst>
               <a:ext uri="{28A0092B-C50C-407E-A947-70E740481C1C}">
                 <a14:useLocalDpi xmlns:a14="http://schemas.microsoft.com/office/drawing/2010/main" val="0"/>
               </a:ext>
               <a:ext uri="{96DAC541-7B7A-43D3-8B79-37D633B846F1}">
-                <asvg:svgBlip xmlns:asvg="http://schemas.microsoft.com/office/drawing/2016/SVG/main" r:embed="rId9"/>
+                <asvg:svgBlip xmlns:asvg="http://schemas.microsoft.com/office/drawing/2016/SVG/main" r:embed="rId10"/>
               </a:ext>
             </a:extLst>
           </a:blip>
@@ -6512,32 +7384,6 @@
               <a:t> Application in X seconds.</a:t>
             </a:r>
           </a:p>
-          <a:p>
-            <a:r>
-              <a:rPr lang="it-IT" dirty="0">
-                <a:solidFill>
-                  <a:srgbClr val="171FE2"/>
-                </a:solidFill>
-              </a:rPr>
-              <a:t>NB: a volte Windows perde il .xml del </a:t>
-            </a:r>
-            <a:r>
-              <a:rPr lang="it-IT" dirty="0" err="1">
-                <a:solidFill>
-                  <a:srgbClr val="171FE2"/>
-                </a:solidFill>
-              </a:rPr>
-              <a:t>pom</a:t>
-            </a:r>
-            <a:r>
-              <a:rPr lang="it-IT" dirty="0">
-                <a:solidFill>
-                  <a:srgbClr val="171FE2"/>
-                </a:solidFill>
-              </a:rPr>
-              <a:t>. Aggiungere l’estensione manualmente in quel caso.</a:t>
-            </a:r>
-          </a:p>
         </p:txBody>
       </p:sp>
       <p:sp>
@@ -6663,8 +7509,8 @@
         </p:nvSpPr>
         <p:spPr>
           <a:xfrm>
-            <a:off x="838200" y="1552981"/>
-            <a:ext cx="4648200" cy="4803369"/>
+            <a:off x="838199" y="1552981"/>
+            <a:ext cx="10515599" cy="4803369"/>
           </a:xfrm>
         </p:spPr>
         <p:txBody>
@@ -6710,70 +7556,6 @@
             <a:r>
               <a:rPr lang="it-IT" dirty="0"/>
               <a:t> Spring Boot (/api/utenti).</a:t>
-            </a:r>
-          </a:p>
-          <a:p>
-            <a:r>
-              <a:rPr lang="it-IT" dirty="0">
-                <a:solidFill>
-                  <a:srgbClr val="171FE2"/>
-                </a:solidFill>
-              </a:rPr>
-              <a:t>Per fare in modo che </a:t>
-            </a:r>
-            <a:r>
-              <a:rPr lang="it-IT" dirty="0" err="1">
-                <a:solidFill>
-                  <a:srgbClr val="171FE2"/>
-                </a:solidFill>
-              </a:rPr>
-              <a:t>Nginx</a:t>
-            </a:r>
-            <a:r>
-              <a:rPr lang="it-IT" dirty="0">
-                <a:solidFill>
-                  <a:srgbClr val="171FE2"/>
-                </a:solidFill>
-              </a:rPr>
-              <a:t> Proxy Manager possa pescare e mostrare la nostra pagina web, dobbiamo mappare la cartella del </a:t>
-            </a:r>
-            <a:r>
-              <a:rPr lang="it-IT" dirty="0" err="1">
-                <a:solidFill>
-                  <a:srgbClr val="171FE2"/>
-                </a:solidFill>
-              </a:rPr>
-              <a:t>frontend</a:t>
-            </a:r>
-            <a:r>
-              <a:rPr lang="it-IT" dirty="0">
-                <a:solidFill>
-                  <a:srgbClr val="171FE2"/>
-                </a:solidFill>
-              </a:rPr>
-              <a:t> all'interno del cluster. </a:t>
-            </a:r>
-          </a:p>
-          <a:p>
-            <a:r>
-              <a:rPr lang="it-IT" dirty="0">
-                <a:solidFill>
-                  <a:srgbClr val="171FE2"/>
-                </a:solidFill>
-              </a:rPr>
-              <a:t>Per uno sviluppo rapido locale</a:t>
-            </a:r>
-            <a:r>
-              <a:rPr lang="it-IT" dirty="0"/>
-              <a:t>, possiamo agganciare la cartella </a:t>
-            </a:r>
-            <a:r>
-              <a:rPr lang="it-IT" dirty="0" err="1"/>
-              <a:t>frontend</a:t>
-            </a:r>
-            <a:r>
-              <a:rPr lang="it-IT" dirty="0"/>
-              <a:t> direttamente come volume statico leggibile dal Proxy. </a:t>
             </a:r>
           </a:p>
           <a:p>
@@ -6827,8 +7609,8 @@
         </p:nvSpPr>
         <p:spPr>
           <a:xfrm>
-            <a:off x="5762171" y="1552981"/>
-            <a:ext cx="6429829" cy="4247317"/>
+            <a:off x="838197" y="3226333"/>
+            <a:ext cx="6429829" cy="2308324"/>
           </a:xfrm>
           <a:prstGeom prst="rect">
             <a:avLst/>
@@ -6842,194 +7624,184 @@
           <a:lstStyle/>
           <a:p>
             <a:r>
-              <a:rPr lang="en-US" dirty="0"/>
-              <a:t>proxy-manager:</a:t>
-            </a:r>
-          </a:p>
-          <a:p>
-            <a:r>
-              <a:rPr lang="en-US" dirty="0"/>
-              <a:t>    image: 'jc21/</a:t>
-            </a:r>
-            <a:r>
-              <a:rPr lang="en-US" dirty="0" err="1"/>
-              <a:t>nginx-proxy-manager:latest</a:t>
-            </a:r>
-            <a:r>
-              <a:rPr lang="en-US" dirty="0"/>
+              <a:rPr lang="it-IT" dirty="0" err="1">
+                <a:latin typeface="Consolas" panose="020B0609020204030204" pitchFamily="49" charset="0"/>
+              </a:rPr>
+              <a:t>enterprise-frontend</a:t>
+            </a:r>
+            <a:r>
+              <a:rPr lang="it-IT" dirty="0">
+                <a:latin typeface="Consolas" panose="020B0609020204030204" pitchFamily="49" charset="0"/>
+              </a:rPr>
+              <a:t>:</a:t>
+            </a:r>
+          </a:p>
+          <a:p>
+            <a:r>
+              <a:rPr lang="it-IT" dirty="0">
+                <a:latin typeface="Consolas" panose="020B0609020204030204" pitchFamily="49" charset="0"/>
+              </a:rPr>
+              <a:t>    image: '</a:t>
+            </a:r>
+            <a:r>
+              <a:rPr lang="it-IT" dirty="0" err="1">
+                <a:latin typeface="Consolas" panose="020B0609020204030204" pitchFamily="49" charset="0"/>
+              </a:rPr>
+              <a:t>nginx:alpine</a:t>
+            </a:r>
+            <a:r>
+              <a:rPr lang="it-IT" dirty="0">
+                <a:latin typeface="Consolas" panose="020B0609020204030204" pitchFamily="49" charset="0"/>
+              </a:rPr>
               <a:t>'</a:t>
             </a:r>
           </a:p>
           <a:p>
             <a:r>
-              <a:rPr lang="en-US" dirty="0"/>
-              <a:t>    </a:t>
-            </a:r>
-            <a:r>
-              <a:rPr lang="en-US" dirty="0" err="1"/>
+              <a:rPr lang="it-IT" dirty="0">
+                <a:latin typeface="Consolas" panose="020B0609020204030204" pitchFamily="49" charset="0"/>
+              </a:rPr>
+              <a:t>    </a:t>
+            </a:r>
+            <a:r>
+              <a:rPr lang="it-IT" dirty="0" err="1">
+                <a:latin typeface="Consolas" panose="020B0609020204030204" pitchFamily="49" charset="0"/>
+              </a:rPr>
               <a:t>container_name</a:t>
             </a:r>
             <a:r>
-              <a:rPr lang="en-US" dirty="0"/>
+              <a:rPr lang="it-IT" dirty="0">
+                <a:latin typeface="Consolas" panose="020B0609020204030204" pitchFamily="49" charset="0"/>
+              </a:rPr>
               <a:t>: </a:t>
             </a:r>
             <a:r>
-              <a:rPr lang="en-US" dirty="0" err="1"/>
-              <a:t>enterprise_proxy_manager</a:t>
-            </a:r>
-            <a:endParaRPr lang="en-US" dirty="0"/>
-          </a:p>
-          <a:p>
-            <a:r>
-              <a:rPr lang="en-US" dirty="0"/>
-              <a:t>    restart: unless-stopped</a:t>
-            </a:r>
-          </a:p>
-          <a:p>
-            <a:r>
-              <a:rPr lang="en-US" dirty="0"/>
-              <a:t>    ports:</a:t>
-            </a:r>
-          </a:p>
-          <a:p>
-            <a:r>
-              <a:rPr lang="en-US" dirty="0"/>
-              <a:t>      - '80:80'</a:t>
-            </a:r>
-          </a:p>
-          <a:p>
-            <a:r>
-              <a:rPr lang="en-US" dirty="0"/>
-              <a:t>      - '443:443'</a:t>
-            </a:r>
-          </a:p>
-          <a:p>
-            <a:r>
-              <a:rPr lang="en-US" dirty="0"/>
-              <a:t>      - '81:81'</a:t>
-            </a:r>
-          </a:p>
-          <a:p>
-            <a:r>
-              <a:rPr lang="en-US" dirty="0"/>
-              <a:t>    volumes:</a:t>
-            </a:r>
-          </a:p>
-          <a:p>
-            <a:r>
-              <a:rPr lang="en-US" dirty="0"/>
-              <a:t>      - ./data:/data</a:t>
-            </a:r>
-          </a:p>
-          <a:p>
-            <a:r>
-              <a:rPr lang="en-US" dirty="0"/>
-              <a:t>      - ./</a:t>
-            </a:r>
-            <a:r>
-              <a:rPr lang="en-US" dirty="0" err="1"/>
-              <a:t>letsencrypt</a:t>
-            </a:r>
-            <a:r>
-              <a:rPr lang="en-US" dirty="0"/>
+              <a:rPr lang="it-IT" dirty="0" err="1">
+                <a:latin typeface="Consolas" panose="020B0609020204030204" pitchFamily="49" charset="0"/>
+              </a:rPr>
+              <a:t>app_enterprise_frontend</a:t>
+            </a:r>
+            <a:endParaRPr lang="it-IT" dirty="0">
+              <a:latin typeface="Consolas" panose="020B0609020204030204" pitchFamily="49" charset="0"/>
+            </a:endParaRPr>
+          </a:p>
+          <a:p>
+            <a:r>
+              <a:rPr lang="it-IT" dirty="0">
+                <a:latin typeface="Consolas" panose="020B0609020204030204" pitchFamily="49" charset="0"/>
+              </a:rPr>
+              <a:t>    </a:t>
+            </a:r>
+            <a:r>
+              <a:rPr lang="it-IT" dirty="0" err="1">
+                <a:latin typeface="Consolas" panose="020B0609020204030204" pitchFamily="49" charset="0"/>
+              </a:rPr>
+              <a:t>restart</a:t>
+            </a:r>
+            <a:r>
+              <a:rPr lang="it-IT" dirty="0">
+                <a:latin typeface="Consolas" panose="020B0609020204030204" pitchFamily="49" charset="0"/>
+              </a:rPr>
+              <a:t>: </a:t>
+            </a:r>
+            <a:r>
+              <a:rPr lang="it-IT" dirty="0" err="1">
+                <a:latin typeface="Consolas" panose="020B0609020204030204" pitchFamily="49" charset="0"/>
+              </a:rPr>
+              <a:t>unless-stopped</a:t>
+            </a:r>
+            <a:endParaRPr lang="it-IT" dirty="0">
+              <a:latin typeface="Consolas" panose="020B0609020204030204" pitchFamily="49" charset="0"/>
+            </a:endParaRPr>
+          </a:p>
+          <a:p>
+            <a:r>
+              <a:rPr lang="it-IT" dirty="0">
+                <a:latin typeface="Consolas" panose="020B0609020204030204" pitchFamily="49" charset="0"/>
+              </a:rPr>
+              <a:t>    </a:t>
+            </a:r>
+            <a:r>
+              <a:rPr lang="it-IT" dirty="0" err="1">
+                <a:latin typeface="Consolas" panose="020B0609020204030204" pitchFamily="49" charset="0"/>
+              </a:rPr>
+              <a:t>volumes</a:t>
+            </a:r>
+            <a:r>
+              <a:rPr lang="it-IT" dirty="0">
+                <a:latin typeface="Consolas" panose="020B0609020204030204" pitchFamily="49" charset="0"/>
+              </a:rPr>
+              <a:t>:</a:t>
+            </a:r>
+          </a:p>
+          <a:p>
+            <a:r>
+              <a:rPr lang="it-IT" dirty="0">
+                <a:latin typeface="Consolas" panose="020B0609020204030204" pitchFamily="49" charset="0"/>
+              </a:rPr>
+              <a:t>      - ./</a:t>
+            </a:r>
+            <a:r>
+              <a:rPr lang="it-IT" dirty="0" err="1">
+                <a:latin typeface="Consolas" panose="020B0609020204030204" pitchFamily="49" charset="0"/>
+              </a:rPr>
+              <a:t>frontend</a:t>
+            </a:r>
+            <a:r>
+              <a:rPr lang="it-IT" dirty="0">
+                <a:latin typeface="Consolas" panose="020B0609020204030204" pitchFamily="49" charset="0"/>
+              </a:rPr>
               <a:t>:/</a:t>
             </a:r>
             <a:r>
-              <a:rPr lang="en-US" dirty="0" err="1"/>
-              <a:t>etc</a:t>
-            </a:r>
-            <a:r>
-              <a:rPr lang="en-US" dirty="0"/>
-              <a:t>/</a:t>
-            </a:r>
-            <a:r>
-              <a:rPr lang="en-US" dirty="0" err="1"/>
-              <a:t>letsencrypt</a:t>
-            </a:r>
-            <a:endParaRPr lang="en-US" dirty="0"/>
-          </a:p>
-          <a:p>
-            <a:r>
-              <a:rPr lang="en-US" dirty="0"/>
-              <a:t>      - ./frontend:/var/www/html </a:t>
-            </a:r>
-            <a:r>
-              <a:rPr lang="en-US" dirty="0">
-                <a:solidFill>
-                  <a:srgbClr val="171FE2"/>
-                </a:solidFill>
-              </a:rPr>
-              <a:t># &lt;-- AGGIUNGERE QUESTA RIGA:     </a:t>
-            </a:r>
-            <a:r>
-              <a:rPr lang="en-US" dirty="0"/>
-              <a:t>			</a:t>
-            </a:r>
-            <a:r>
-              <a:rPr lang="en-US" dirty="0" err="1">
-                <a:solidFill>
-                  <a:srgbClr val="171FE2"/>
-                </a:solidFill>
-              </a:rPr>
-              <a:t>mappa</a:t>
-            </a:r>
-            <a:r>
-              <a:rPr lang="en-US" dirty="0">
-                <a:solidFill>
-                  <a:srgbClr val="171FE2"/>
-                </a:solidFill>
-              </a:rPr>
-              <a:t> </a:t>
-            </a:r>
-            <a:r>
-              <a:rPr lang="en-US" dirty="0" err="1">
-                <a:solidFill>
-                  <a:srgbClr val="171FE2"/>
-                </a:solidFill>
-              </a:rPr>
-              <a:t>i</a:t>
-            </a:r>
-            <a:r>
-              <a:rPr lang="en-US" dirty="0">
-                <a:solidFill>
-                  <a:srgbClr val="171FE2"/>
-                </a:solidFill>
-              </a:rPr>
-              <a:t> file </a:t>
-            </a:r>
-            <a:r>
-              <a:rPr lang="en-US" dirty="0" err="1">
-                <a:solidFill>
-                  <a:srgbClr val="171FE2"/>
-                </a:solidFill>
-              </a:rPr>
-              <a:t>statici</a:t>
-            </a:r>
-            <a:r>
-              <a:rPr lang="en-US" dirty="0">
-                <a:solidFill>
-                  <a:srgbClr val="171FE2"/>
-                </a:solidFill>
-              </a:rPr>
-              <a:t> del frontend</a:t>
-            </a:r>
-          </a:p>
-          <a:p>
-            <a:r>
-              <a:rPr lang="en-US" dirty="0"/>
-              <a:t>    networks:</a:t>
-            </a:r>
-          </a:p>
-          <a:p>
-            <a:r>
-              <a:rPr lang="en-US" dirty="0"/>
-              <a:t>      - </a:t>
-            </a:r>
-            <a:r>
-              <a:rPr lang="en-US" dirty="0" err="1"/>
+              <a:rPr lang="it-IT" dirty="0" err="1">
+                <a:latin typeface="Consolas" panose="020B0609020204030204" pitchFamily="49" charset="0"/>
+              </a:rPr>
+              <a:t>usr</a:t>
+            </a:r>
+            <a:r>
+              <a:rPr lang="it-IT" dirty="0">
+                <a:latin typeface="Consolas" panose="020B0609020204030204" pitchFamily="49" charset="0"/>
+              </a:rPr>
+              <a:t>/share/</a:t>
+            </a:r>
+            <a:r>
+              <a:rPr lang="it-IT" dirty="0" err="1">
+                <a:latin typeface="Consolas" panose="020B0609020204030204" pitchFamily="49" charset="0"/>
+              </a:rPr>
+              <a:t>nginx</a:t>
+            </a:r>
+            <a:r>
+              <a:rPr lang="it-IT" dirty="0">
+                <a:latin typeface="Consolas" panose="020B0609020204030204" pitchFamily="49" charset="0"/>
+              </a:rPr>
+              <a:t>/html</a:t>
+            </a:r>
+          </a:p>
+          <a:p>
+            <a:r>
+              <a:rPr lang="it-IT" dirty="0">
+                <a:latin typeface="Consolas" panose="020B0609020204030204" pitchFamily="49" charset="0"/>
+              </a:rPr>
+              <a:t>    networks:</a:t>
+            </a:r>
+          </a:p>
+          <a:p>
+            <a:r>
+              <a:rPr lang="it-IT" dirty="0">
+                <a:latin typeface="Consolas" panose="020B0609020204030204" pitchFamily="49" charset="0"/>
+              </a:rPr>
+              <a:t>      - </a:t>
+            </a:r>
+            <a:r>
+              <a:rPr lang="it-IT" dirty="0" err="1">
+                <a:latin typeface="Consolas" panose="020B0609020204030204" pitchFamily="49" charset="0"/>
+              </a:rPr>
               <a:t>rete_enterprise</a:t>
             </a:r>
-            <a:endParaRPr lang="it-IT" dirty="0"/>
+            <a:endParaRPr lang="it-IT" dirty="0">
+              <a:latin typeface="Consolas" panose="020B0609020204030204" pitchFamily="49" charset="0"/>
+            </a:endParaRPr>
           </a:p>
         </p:txBody>
       </p:sp>
@@ -7047,6 +7819,246 @@
 </file>
 
 <file path=ppt/slides/slide17.xml><?xml version="1.0" encoding="utf-8"?>
+<p:sld xmlns:a="http://schemas.openxmlformats.org/drawingml/2006/main" xmlns:r="http://schemas.openxmlformats.org/officeDocument/2006/relationships" xmlns:p="http://schemas.openxmlformats.org/presentationml/2006/main">
+  <p:cSld>
+    <p:spTree>
+      <p:nvGrpSpPr>
+        <p:cNvPr id="1" name="">
+          <a:extLst>
+            <a:ext uri="{FF2B5EF4-FFF2-40B4-BE49-F238E27FC236}">
+              <a16:creationId xmlns:a16="http://schemas.microsoft.com/office/drawing/2014/main" id="{7C24B38C-2266-D00D-16D2-15F4A80B413C}"/>
+            </a:ext>
+          </a:extLst>
+        </p:cNvPr>
+        <p:cNvGrpSpPr/>
+        <p:nvPr/>
+      </p:nvGrpSpPr>
+      <p:grpSpPr>
+        <a:xfrm>
+          <a:off x="0" y="0"/>
+          <a:ext cx="0" cy="0"/>
+          <a:chOff x="0" y="0"/>
+          <a:chExt cx="0" cy="0"/>
+        </a:xfrm>
+      </p:grpSpPr>
+      <p:sp>
+        <p:nvSpPr>
+          <p:cNvPr id="2" name="Titolo della lezione">
+            <a:extLst>
+              <a:ext uri="{FF2B5EF4-FFF2-40B4-BE49-F238E27FC236}">
+                <a16:creationId xmlns:a16="http://schemas.microsoft.com/office/drawing/2014/main" id="{96719C03-9F15-16E1-FD28-B47DFA08FDAC}"/>
+              </a:ext>
+            </a:extLst>
+          </p:cNvPr>
+          <p:cNvSpPr>
+            <a:spLocks noGrp="1"/>
+          </p:cNvSpPr>
+          <p:nvPr>
+            <p:ph type="title"/>
+          </p:nvPr>
+        </p:nvSpPr>
+        <p:spPr>
+          <a:xfrm>
+            <a:off x="838200" y="831206"/>
+            <a:ext cx="10515600" cy="314198"/>
+          </a:xfrm>
+        </p:spPr>
+        <p:txBody>
+          <a:bodyPr/>
+          <a:lstStyle/>
+          <a:p>
+            <a:r>
+              <a:rPr lang="it-IT" dirty="0"/>
+              <a:t>Slide 15: Caso di fallimento di rete (TLS </a:t>
+            </a:r>
+            <a:r>
+              <a:rPr lang="it-IT" dirty="0" err="1"/>
+              <a:t>handshake</a:t>
+            </a:r>
+            <a:r>
+              <a:rPr lang="it-IT" dirty="0"/>
+              <a:t> </a:t>
+            </a:r>
+            <a:r>
+              <a:rPr lang="it-IT" dirty="0" err="1"/>
+              <a:t>timeout</a:t>
+            </a:r>
+            <a:r>
+              <a:rPr lang="it-IT" dirty="0"/>
+              <a:t>)</a:t>
+            </a:r>
+          </a:p>
+        </p:txBody>
+      </p:sp>
+      <p:sp>
+        <p:nvSpPr>
+          <p:cNvPr id="3" name="Contenuto della lezione">
+            <a:extLst>
+              <a:ext uri="{FF2B5EF4-FFF2-40B4-BE49-F238E27FC236}">
+                <a16:creationId xmlns:a16="http://schemas.microsoft.com/office/drawing/2014/main" id="{9F63FC29-11E5-AB73-C045-F87F56C5A30E}"/>
+              </a:ext>
+            </a:extLst>
+          </p:cNvPr>
+          <p:cNvSpPr>
+            <a:spLocks noGrp="1"/>
+          </p:cNvSpPr>
+          <p:nvPr>
+            <p:ph idx="1"/>
+          </p:nvPr>
+        </p:nvSpPr>
+        <p:spPr>
+          <a:xfrm>
+            <a:off x="838201" y="1261008"/>
+            <a:ext cx="10515599" cy="4803369"/>
+          </a:xfrm>
+        </p:spPr>
+        <p:txBody>
+          <a:bodyPr/>
+          <a:lstStyle/>
+          <a:p>
+            <a:r>
+              <a:rPr lang="it-IT" dirty="0"/>
+              <a:t>Può capitare che Docker Desktop, nel provare a connettersi ai server ufficiali di Docker Hub per scaricare un'immagine (es. eclipse-temurin:17-jre-alpine), subisca una connessione che impiega troppo tempo andando in </a:t>
+            </a:r>
+            <a:r>
+              <a:rPr lang="it-IT" dirty="0" err="1"/>
+              <a:t>timeout</a:t>
+            </a:r>
+            <a:r>
+              <a:rPr lang="it-IT" dirty="0"/>
+              <a:t>.</a:t>
+            </a:r>
+          </a:p>
+          <a:p>
+            <a:r>
+              <a:rPr lang="it-IT" dirty="0"/>
+              <a:t>Invece di far fare tutto al build del compose, costringiamo Docker a scaricare l'immagine da sola, pulendo la sessione di rete. Eseguiamo da terminale il comando:</a:t>
+            </a:r>
+          </a:p>
+          <a:p>
+            <a:r>
+              <a:rPr lang="it-IT" dirty="0" err="1">
+                <a:solidFill>
+                  <a:srgbClr val="171FE2"/>
+                </a:solidFill>
+                <a:latin typeface="Consolas" panose="020B0609020204030204" pitchFamily="49" charset="0"/>
+              </a:rPr>
+              <a:t>docker</a:t>
+            </a:r>
+            <a:r>
+              <a:rPr lang="it-IT" dirty="0">
+                <a:solidFill>
+                  <a:srgbClr val="171FE2"/>
+                </a:solidFill>
+                <a:latin typeface="Consolas" panose="020B0609020204030204" pitchFamily="49" charset="0"/>
+              </a:rPr>
+              <a:t> pull eclipse-temurin:17-jre-alpine</a:t>
+            </a:r>
+          </a:p>
+          <a:p>
+            <a:r>
+              <a:rPr lang="it-IT" dirty="0"/>
+              <a:t>Se il comando va a buon fine: L'immagine viene salvata ed a quel punto possiamo rilanciare: </a:t>
+            </a:r>
+            <a:r>
+              <a:rPr lang="it-IT" dirty="0" err="1">
+                <a:solidFill>
+                  <a:srgbClr val="171FE2"/>
+                </a:solidFill>
+                <a:latin typeface="Consolas" panose="020B0609020204030204" pitchFamily="49" charset="0"/>
+              </a:rPr>
+              <a:t>docker</a:t>
+            </a:r>
+            <a:r>
+              <a:rPr lang="it-IT" dirty="0">
+                <a:solidFill>
+                  <a:srgbClr val="171FE2"/>
+                </a:solidFill>
+                <a:latin typeface="Consolas" panose="020B0609020204030204" pitchFamily="49" charset="0"/>
+              </a:rPr>
+              <a:t> compose up -d --build</a:t>
+            </a:r>
+          </a:p>
+        </p:txBody>
+      </p:sp>
+      <p:sp>
+        <p:nvSpPr>
+          <p:cNvPr id="12" name="Segnaposto numero diapositiva 11">
+            <a:extLst>
+              <a:ext uri="{FF2B5EF4-FFF2-40B4-BE49-F238E27FC236}">
+                <a16:creationId xmlns:a16="http://schemas.microsoft.com/office/drawing/2014/main" id="{625A3919-0E7A-DC1C-721E-49E9A7F438B3}"/>
+              </a:ext>
+            </a:extLst>
+          </p:cNvPr>
+          <p:cNvSpPr>
+            <a:spLocks noGrp="1"/>
+          </p:cNvSpPr>
+          <p:nvPr>
+            <p:ph type="sldNum" sz="quarter" idx="12"/>
+          </p:nvPr>
+        </p:nvSpPr>
+        <p:spPr/>
+        <p:txBody>
+          <a:bodyPr/>
+          <a:lstStyle/>
+          <a:p>
+            <a:r>
+              <a:rPr lang="it-IT" dirty="0"/>
+              <a:t>15</a:t>
+            </a:r>
+          </a:p>
+        </p:txBody>
+      </p:sp>
+      <p:pic>
+        <p:nvPicPr>
+          <p:cNvPr id="8" name="Immagine 7">
+            <a:extLst>
+              <a:ext uri="{FF2B5EF4-FFF2-40B4-BE49-F238E27FC236}">
+                <a16:creationId xmlns:a16="http://schemas.microsoft.com/office/drawing/2014/main" id="{650309FA-469B-18CD-3817-264C40BD9427}"/>
+              </a:ext>
+            </a:extLst>
+          </p:cNvPr>
+          <p:cNvPicPr>
+            <a:picLocks noChangeAspect="1"/>
+          </p:cNvPicPr>
+          <p:nvPr/>
+        </p:nvPicPr>
+        <p:blipFill>
+          <a:blip r:embed="rId3">
+            <a:extLst>
+              <a:ext uri="{28A0092B-C50C-407E-A947-70E740481C1C}">
+                <a14:useLocalDpi xmlns:a14="http://schemas.microsoft.com/office/drawing/2010/main" val="0"/>
+              </a:ext>
+            </a:extLst>
+          </a:blip>
+          <a:stretch>
+            <a:fillRect/>
+          </a:stretch>
+        </p:blipFill>
+        <p:spPr>
+          <a:xfrm>
+            <a:off x="0" y="3767328"/>
+            <a:ext cx="11035522" cy="3090673"/>
+          </a:xfrm>
+          <a:prstGeom prst="rect">
+            <a:avLst/>
+          </a:prstGeom>
+        </p:spPr>
+      </p:pic>
+    </p:spTree>
+    <p:extLst>
+      <p:ext uri="{BB962C8B-B14F-4D97-AF65-F5344CB8AC3E}">
+        <p14:creationId xmlns:p14="http://schemas.microsoft.com/office/powerpoint/2010/main" val="1725035476"/>
+      </p:ext>
+    </p:extLst>
+  </p:cSld>
+  <p:clrMapOvr>
+    <a:masterClrMapping/>
+  </p:clrMapOvr>
+</p:sld>
+</file>
+
+<file path=ppt/slides/slide18.xml><?xml version="1.0" encoding="utf-8"?>
 <p:sld xmlns:a="http://schemas.openxmlformats.org/drawingml/2006/main" xmlns:r="http://schemas.openxmlformats.org/officeDocument/2006/relationships" xmlns:p="http://schemas.openxmlformats.org/presentationml/2006/main">
   <p:cSld>
     <p:spTree>
@@ -7097,7 +8109,7 @@
           <a:p>
             <a:r>
               <a:rPr lang="it-IT" dirty="0"/>
-              <a:t>Slide 15: Step 10 – Configurazione Visuale dell'Host in </a:t>
+              <a:t>Slide 16: Step 10/1 – Configurazione Visuale dell'Host in </a:t>
             </a:r>
             <a:r>
               <a:rPr lang="it-IT" dirty="0" err="1"/>
@@ -7234,81 +8246,19 @@
             </a:r>
             <a:r>
               <a:rPr lang="it-IT" dirty="0"/>
-              <a:t> (o un dominio di test a scelta).</a:t>
-            </a:r>
-          </a:p>
-          <a:p>
+              <a:t> (o un dominio di test a scelta) e </a:t>
+            </a:r>
             <a:r>
               <a:rPr lang="it-IT" dirty="0" err="1"/>
-              <a:t>Scheme</a:t>
-            </a:r>
-            <a:r>
-              <a:rPr lang="it-IT" dirty="0"/>
-              <a:t>: </a:t>
-            </a:r>
-            <a:r>
-              <a:rPr lang="it-IT" dirty="0" err="1"/>
-              <a:t>httpForward</a:t>
-            </a:r>
-            <a:r>
-              <a:rPr lang="it-IT" dirty="0"/>
-              <a:t> </a:t>
-            </a:r>
-            <a:r>
-              <a:rPr lang="it-IT" dirty="0" err="1"/>
-              <a:t>Hostname</a:t>
-            </a:r>
-            <a:r>
-              <a:rPr lang="it-IT" dirty="0"/>
-              <a:t> / IP: </a:t>
-            </a:r>
-            <a:r>
-              <a:rPr lang="it-IT" dirty="0" err="1"/>
-              <a:t>enterprise-backend</a:t>
-            </a:r>
-            <a:r>
-              <a:rPr lang="it-IT" dirty="0"/>
-              <a:t> (il nome del servizio Docker di Spring Boot!)</a:t>
-            </a:r>
-          </a:p>
-          <a:p>
-            <a:r>
-              <a:rPr lang="it-IT" dirty="0"/>
-              <a:t>Forward Port: 8080</a:t>
-            </a:r>
-          </a:p>
-          <a:p>
-            <a:r>
-              <a:rPr lang="it-IT" dirty="0"/>
-              <a:t>Cliccare su Save.</a:t>
-            </a:r>
-          </a:p>
-          <a:p>
-            <a:r>
-              <a:rPr lang="it-IT" dirty="0"/>
-              <a:t>Grazie alla rete condivisa </a:t>
-            </a:r>
-            <a:r>
-              <a:rPr lang="it-IT" dirty="0" err="1"/>
-              <a:t>rete_enterprise</a:t>
-            </a:r>
-            <a:r>
-              <a:rPr lang="it-IT" dirty="0"/>
-              <a:t>, NPM è in grado di risolvere il nome del container </a:t>
-            </a:r>
-            <a:r>
-              <a:rPr lang="it-IT" dirty="0" err="1"/>
-              <a:t>enterprise-backend</a:t>
-            </a:r>
-            <a:r>
-              <a:rPr lang="it-IT" dirty="0"/>
-              <a:t> come se fosse un vero indirizzo IP di rete locale, instradando le chiamate HTTP alla porta di Tomcat.</a:t>
-            </a:r>
-            <a:endParaRPr lang="it-IT" dirty="0">
-              <a:solidFill>
-                <a:srgbClr val="171FE2"/>
-              </a:solidFill>
-            </a:endParaRPr>
+              <a:t>localhost</a:t>
+            </a:r>
+            <a:r>
+              <a:rPr lang="it-IT" dirty="0"/>
+              <a:t>.</a:t>
+            </a:r>
+          </a:p>
+          <a:p>
+            <a:endParaRPr lang="it-IT" dirty="0"/>
           </a:p>
         </p:txBody>
       </p:sp>
@@ -7335,11 +8285,83 @@
           <a:p>
             <a:r>
               <a:rPr lang="it-IT" dirty="0"/>
-              <a:t>15</a:t>
-            </a:r>
-          </a:p>
-        </p:txBody>
-      </p:sp>
+              <a:t>16</a:t>
+            </a:r>
+          </a:p>
+        </p:txBody>
+      </p:sp>
+      <p:pic>
+        <p:nvPicPr>
+          <p:cNvPr id="5" name="Immagine 4">
+            <a:extLst>
+              <a:ext uri="{FF2B5EF4-FFF2-40B4-BE49-F238E27FC236}">
+                <a16:creationId xmlns:a16="http://schemas.microsoft.com/office/drawing/2014/main" id="{A440C155-76ED-3C46-D9F2-01D79E58A8CA}"/>
+              </a:ext>
+            </a:extLst>
+          </p:cNvPr>
+          <p:cNvPicPr>
+            <a:picLocks noChangeAspect="1"/>
+          </p:cNvPicPr>
+          <p:nvPr/>
+        </p:nvPicPr>
+        <p:blipFill>
+          <a:blip r:embed="rId4">
+            <a:extLst>
+              <a:ext uri="{28A0092B-C50C-407E-A947-70E740481C1C}">
+                <a14:useLocalDpi xmlns:a14="http://schemas.microsoft.com/office/drawing/2010/main" val="0"/>
+              </a:ext>
+            </a:extLst>
+          </a:blip>
+          <a:stretch>
+            <a:fillRect/>
+          </a:stretch>
+        </p:blipFill>
+        <p:spPr>
+          <a:xfrm>
+            <a:off x="838200" y="3954665"/>
+            <a:ext cx="5039428" cy="2257740"/>
+          </a:xfrm>
+          <a:prstGeom prst="rect">
+            <a:avLst/>
+          </a:prstGeom>
+        </p:spPr>
+      </p:pic>
+      <p:pic>
+        <p:nvPicPr>
+          <p:cNvPr id="7" name="Immagine 6">
+            <a:extLst>
+              <a:ext uri="{FF2B5EF4-FFF2-40B4-BE49-F238E27FC236}">
+                <a16:creationId xmlns:a16="http://schemas.microsoft.com/office/drawing/2014/main" id="{D27BD8D9-96BA-98A1-038D-58123539D305}"/>
+              </a:ext>
+            </a:extLst>
+          </p:cNvPr>
+          <p:cNvPicPr>
+            <a:picLocks noChangeAspect="1"/>
+          </p:cNvPicPr>
+          <p:nvPr/>
+        </p:nvPicPr>
+        <p:blipFill>
+          <a:blip r:embed="rId5">
+            <a:extLst>
+              <a:ext uri="{28A0092B-C50C-407E-A947-70E740481C1C}">
+                <a14:useLocalDpi xmlns:a14="http://schemas.microsoft.com/office/drawing/2010/main" val="0"/>
+              </a:ext>
+            </a:extLst>
+          </a:blip>
+          <a:stretch>
+            <a:fillRect/>
+          </a:stretch>
+        </p:blipFill>
+        <p:spPr>
+          <a:xfrm>
+            <a:off x="6138517" y="3928465"/>
+            <a:ext cx="4751987" cy="2646096"/>
+          </a:xfrm>
+          <a:prstGeom prst="rect">
+            <a:avLst/>
+          </a:prstGeom>
+        </p:spPr>
+      </p:pic>
     </p:spTree>
     <p:extLst>
       <p:ext uri="{BB962C8B-B14F-4D97-AF65-F5344CB8AC3E}">
@@ -7353,12 +8375,18 @@
 </p:sld>
 </file>
 
-<file path=ppt/slides/slide18.xml><?xml version="1.0" encoding="utf-8"?>
+<file path=ppt/slides/slide19.xml><?xml version="1.0" encoding="utf-8"?>
 <p:sld xmlns:a="http://schemas.openxmlformats.org/drawingml/2006/main" xmlns:r="http://schemas.openxmlformats.org/officeDocument/2006/relationships" xmlns:p="http://schemas.openxmlformats.org/presentationml/2006/main">
   <p:cSld>
     <p:spTree>
       <p:nvGrpSpPr>
-        <p:cNvPr id="1" name=""/>
+        <p:cNvPr id="1" name="">
+          <a:extLst>
+            <a:ext uri="{FF2B5EF4-FFF2-40B4-BE49-F238E27FC236}">
+              <a16:creationId xmlns:a16="http://schemas.microsoft.com/office/drawing/2014/main" id="{D9BC5896-A570-445C-1E5D-99128D68E1E6}"/>
+            </a:ext>
+          </a:extLst>
+        </p:cNvPr>
         <p:cNvGrpSpPr/>
         <p:nvPr/>
       </p:nvGrpSpPr>
@@ -7372,10 +8400,10 @@
       </p:grpSpPr>
       <p:sp>
         <p:nvSpPr>
-          <p:cNvPr id="2" name="Titolo 1">
-            <a:extLst>
-              <a:ext uri="{FF2B5EF4-FFF2-40B4-BE49-F238E27FC236}">
-                <a16:creationId xmlns:a16="http://schemas.microsoft.com/office/drawing/2014/main" id="{B5E02355-4941-9C10-CA1D-649F04DB5143}"/>
+          <p:cNvPr id="2" name="Titolo della lezione">
+            <a:extLst>
+              <a:ext uri="{FF2B5EF4-FFF2-40B4-BE49-F238E27FC236}">
+                <a16:creationId xmlns:a16="http://schemas.microsoft.com/office/drawing/2014/main" id="{F6D11410-AFAD-D6DF-FE3C-5C7BDC154F09}"/>
               </a:ext>
             </a:extLst>
           </p:cNvPr>
@@ -7386,24 +8414,367 @@
             <p:ph type="title"/>
           </p:nvPr>
         </p:nvSpPr>
-        <p:spPr/>
+        <p:spPr>
+          <a:xfrm>
+            <a:off x="838200" y="831206"/>
+            <a:ext cx="10515600" cy="314198"/>
+          </a:xfrm>
+        </p:spPr>
         <p:txBody>
           <a:bodyPr/>
           <a:lstStyle/>
           <a:p>
             <a:r>
-              <a:rPr lang="it-IT" spc="0" dirty="0">
+              <a:rPr lang="it-IT" dirty="0"/>
+              <a:t>Slide 17: Step 10/2 – Configurazione Visuale dell'Host in </a:t>
+            </a:r>
+            <a:r>
+              <a:rPr lang="it-IT" dirty="0" err="1"/>
+              <a:t>Nginx</a:t>
+            </a:r>
+            <a:r>
+              <a:rPr lang="it-IT" dirty="0"/>
+              <a:t> Proxy Manager(</a:t>
+            </a:r>
+            <a:r>
+              <a:rPr lang="it-IT" dirty="0" err="1"/>
+              <a:t>Prod</a:t>
+            </a:r>
+            <a:r>
+              <a:rPr lang="it-IT" dirty="0"/>
+              <a:t>)</a:t>
+            </a:r>
+          </a:p>
+        </p:txBody>
+      </p:sp>
+      <p:sp>
+        <p:nvSpPr>
+          <p:cNvPr id="3" name="Contenuto della lezione">
+            <a:extLst>
+              <a:ext uri="{FF2B5EF4-FFF2-40B4-BE49-F238E27FC236}">
+                <a16:creationId xmlns:a16="http://schemas.microsoft.com/office/drawing/2014/main" id="{54B990A2-6465-ED65-FC08-EEF1532C6F51}"/>
+              </a:ext>
+            </a:extLst>
+          </p:cNvPr>
+          <p:cNvSpPr>
+            <a:spLocks noGrp="1"/>
+          </p:cNvSpPr>
+          <p:nvPr>
+            <p:ph idx="1"/>
+          </p:nvPr>
+        </p:nvSpPr>
+        <p:spPr>
+          <a:xfrm>
+            <a:off x="-1" y="1552981"/>
+            <a:ext cx="7565135" cy="4803369"/>
+          </a:xfrm>
+        </p:spPr>
+        <p:txBody>
+          <a:bodyPr/>
+          <a:lstStyle/>
+          <a:p>
+            <a:r>
+              <a:rPr lang="it-IT" dirty="0"/>
+              <a:t>In </a:t>
+            </a:r>
+            <a:r>
+              <a:rPr lang="it-IT" b="1" dirty="0"/>
+              <a:t>Dettagli </a:t>
+            </a:r>
+            <a:r>
+              <a:rPr lang="it-IT" dirty="0"/>
+              <a:t>definiamo l'</a:t>
+            </a:r>
+            <a:r>
+              <a:rPr lang="it-IT" b="1" dirty="0"/>
+              <a:t>ingresso principale</a:t>
+            </a:r>
+            <a:r>
+              <a:rPr lang="it-IT" dirty="0"/>
+              <a:t> del server, indicando a </a:t>
+            </a:r>
+            <a:r>
+              <a:rPr lang="it-IT" dirty="0" err="1"/>
+              <a:t>Nginx</a:t>
+            </a:r>
+            <a:r>
+              <a:rPr lang="it-IT" dirty="0"/>
+              <a:t> cosa deve ascoltare dall'esterno (il tuo browser) e dove deve mandare gli utenti di default.</a:t>
+            </a:r>
+          </a:p>
+          <a:p>
+            <a:r>
+              <a:rPr lang="it-IT" b="1" dirty="0"/>
+              <a:t>Nomi di Dominio (</a:t>
+            </a:r>
+            <a:r>
+              <a:rPr lang="it-IT" b="1" dirty="0" err="1"/>
+              <a:t>azienda.skillfactory.local</a:t>
+            </a:r>
+            <a:r>
+              <a:rPr lang="it-IT" b="1" dirty="0"/>
+              <a:t>, </a:t>
+            </a:r>
+            <a:r>
+              <a:rPr lang="it-IT" b="1" dirty="0" err="1"/>
+              <a:t>localhost</a:t>
+            </a:r>
+            <a:r>
+              <a:rPr lang="it-IT" b="1" dirty="0"/>
+              <a:t>):</a:t>
+            </a:r>
+            <a:endParaRPr lang="it-IT" dirty="0"/>
+          </a:p>
+          <a:p>
+            <a:pPr lvl="1"/>
+            <a:r>
+              <a:rPr lang="it-IT" sz="1800" dirty="0">
                 <a:latin typeface="Neue Haas Grotesk Text Pro" panose="020B0504020202020204" pitchFamily="34" charset="0"/>
               </a:rPr>
-              <a:t>GRAZIE PER L’ATTENZIONE</a:t>
-            </a:r>
+              <a:t>Sono gli indirizzi che digitiamo sulla barra del browser. </a:t>
+            </a:r>
+            <a:r>
+              <a:rPr lang="it-IT" sz="1800" dirty="0" err="1">
+                <a:latin typeface="Neue Haas Grotesk Text Pro" panose="020B0504020202020204" pitchFamily="34" charset="0"/>
+              </a:rPr>
+              <a:t>Nginx</a:t>
+            </a:r>
+            <a:r>
+              <a:rPr lang="it-IT" sz="1800" dirty="0">
+                <a:latin typeface="Neue Haas Grotesk Text Pro" panose="020B0504020202020204" pitchFamily="34" charset="0"/>
+              </a:rPr>
+              <a:t> rimarrà in ascolto e si attiverà solo quando scriviamo una di queste due parole.</a:t>
+            </a:r>
+          </a:p>
+          <a:p>
+            <a:r>
+              <a:rPr lang="it-IT" b="1" dirty="0"/>
+              <a:t>Schema (http):</a:t>
+            </a:r>
+            <a:endParaRPr lang="it-IT" dirty="0"/>
+          </a:p>
+          <a:p>
+            <a:pPr lvl="1"/>
+            <a:r>
+              <a:rPr lang="it-IT" sz="1800" dirty="0">
+                <a:latin typeface="Neue Haas Grotesk Text Pro" panose="020B0504020202020204" pitchFamily="34" charset="0"/>
+              </a:rPr>
+              <a:t>Indica il protocollo di connessione classico (porta 80), senza certificato SSL (che sarebbe HTTPS).</a:t>
+            </a:r>
+          </a:p>
+          <a:p>
+            <a:r>
+              <a:rPr lang="it-IT" b="1" dirty="0" err="1"/>
+              <a:t>Hostname</a:t>
+            </a:r>
+            <a:r>
+              <a:rPr lang="it-IT" b="1" dirty="0"/>
+              <a:t> / IP di Destinazione (</a:t>
+            </a:r>
+            <a:r>
+              <a:rPr lang="it-IT" b="1" dirty="0" err="1"/>
+              <a:t>enterprise-frontend</a:t>
+            </a:r>
+            <a:r>
+              <a:rPr lang="it-IT" b="1" dirty="0"/>
+              <a:t>):</a:t>
+            </a:r>
+            <a:endParaRPr lang="it-IT" dirty="0"/>
+          </a:p>
+          <a:p>
+            <a:pPr lvl="1"/>
+            <a:r>
+              <a:rPr lang="it-IT" sz="1800" dirty="0">
+                <a:latin typeface="Neue Haas Grotesk Text Pro" panose="020B0504020202020204" pitchFamily="34" charset="0"/>
+              </a:rPr>
+              <a:t>È la destinazione di default. Quando digitiamo semplicemente http://localhost, </a:t>
+            </a:r>
+            <a:r>
+              <a:rPr lang="it-IT" sz="1800" dirty="0" err="1">
+                <a:latin typeface="Neue Haas Grotesk Text Pro" panose="020B0504020202020204" pitchFamily="34" charset="0"/>
+              </a:rPr>
+              <a:t>Nginx</a:t>
+            </a:r>
+            <a:r>
+              <a:rPr lang="it-IT" sz="1800" dirty="0">
+                <a:latin typeface="Neue Haas Grotesk Text Pro" panose="020B0504020202020204" pitchFamily="34" charset="0"/>
+              </a:rPr>
+              <a:t> prende la richiesta e la devia immediatamente al container che contiene i file HTML/React. </a:t>
+            </a:r>
+            <a:r>
+              <a:rPr lang="it-IT" sz="1800" b="1" dirty="0">
+                <a:solidFill>
+                  <a:srgbClr val="171FE2"/>
+                </a:solidFill>
+                <a:latin typeface="Neue Haas Grotesk Text Pro" panose="020B0504020202020204" pitchFamily="34" charset="0"/>
+              </a:rPr>
+              <a:t>Usiamo il nome del servizio del file compose (</a:t>
+            </a:r>
+            <a:r>
+              <a:rPr lang="it-IT" sz="1800" b="1" dirty="0" err="1">
+                <a:solidFill>
+                  <a:srgbClr val="171FE2"/>
+                </a:solidFill>
+                <a:latin typeface="Neue Haas Grotesk Text Pro" panose="020B0504020202020204" pitchFamily="34" charset="0"/>
+              </a:rPr>
+              <a:t>enterprise-frontend</a:t>
+            </a:r>
+            <a:r>
+              <a:rPr lang="it-IT" sz="1800" b="1" dirty="0">
+                <a:solidFill>
+                  <a:srgbClr val="171FE2"/>
+                </a:solidFill>
+                <a:latin typeface="Neue Haas Grotesk Text Pro" panose="020B0504020202020204" pitchFamily="34" charset="0"/>
+              </a:rPr>
+              <a:t>), non il nome del container.</a:t>
+            </a:r>
+          </a:p>
+          <a:p>
+            <a:endParaRPr lang="it-IT" dirty="0"/>
+          </a:p>
+        </p:txBody>
+      </p:sp>
+      <p:sp>
+        <p:nvSpPr>
+          <p:cNvPr id="12" name="Segnaposto numero diapositiva 11">
+            <a:extLst>
+              <a:ext uri="{FF2B5EF4-FFF2-40B4-BE49-F238E27FC236}">
+                <a16:creationId xmlns:a16="http://schemas.microsoft.com/office/drawing/2014/main" id="{54C9CDC9-71D5-CEE0-47A9-F9F0775E520D}"/>
+              </a:ext>
+            </a:extLst>
+          </p:cNvPr>
+          <p:cNvSpPr>
+            <a:spLocks noGrp="1"/>
+          </p:cNvSpPr>
+          <p:nvPr>
+            <p:ph type="sldNum" sz="quarter" idx="12"/>
+          </p:nvPr>
+        </p:nvSpPr>
+        <p:spPr/>
+        <p:txBody>
+          <a:bodyPr/>
+          <a:lstStyle/>
+          <a:p>
+            <a:r>
+              <a:rPr lang="it-IT" dirty="0"/>
+              <a:t>17</a:t>
+            </a:r>
+          </a:p>
+        </p:txBody>
+      </p:sp>
+      <p:pic>
+        <p:nvPicPr>
+          <p:cNvPr id="5" name="Immagine 4">
+            <a:extLst>
+              <a:ext uri="{FF2B5EF4-FFF2-40B4-BE49-F238E27FC236}">
+                <a16:creationId xmlns:a16="http://schemas.microsoft.com/office/drawing/2014/main" id="{6F8B2B68-116D-9C48-BDE1-6EB8C930B09F}"/>
+              </a:ext>
+            </a:extLst>
+          </p:cNvPr>
+          <p:cNvPicPr>
+            <a:picLocks noChangeAspect="1"/>
+          </p:cNvPicPr>
+          <p:nvPr/>
+        </p:nvPicPr>
+        <p:blipFill>
+          <a:blip r:embed="rId3">
+            <a:extLst>
+              <a:ext uri="{28A0092B-C50C-407E-A947-70E740481C1C}">
+                <a14:useLocalDpi xmlns:a14="http://schemas.microsoft.com/office/drawing/2010/main" val="0"/>
+              </a:ext>
+            </a:extLst>
+          </a:blip>
+          <a:stretch>
+            <a:fillRect/>
+          </a:stretch>
+        </p:blipFill>
+        <p:spPr>
+          <a:xfrm>
+            <a:off x="7565135" y="1472185"/>
+            <a:ext cx="4623287" cy="2071302"/>
+          </a:xfrm>
+          <a:prstGeom prst="rect">
+            <a:avLst/>
+          </a:prstGeom>
+        </p:spPr>
+      </p:pic>
+      <p:sp>
+        <p:nvSpPr>
+          <p:cNvPr id="4" name="CasellaDiTesto 3">
+            <a:extLst>
+              <a:ext uri="{FF2B5EF4-FFF2-40B4-BE49-F238E27FC236}">
+                <a16:creationId xmlns:a16="http://schemas.microsoft.com/office/drawing/2014/main" id="{FD62AC97-FB47-14DF-FA1D-744EEBC52477}"/>
+              </a:ext>
+            </a:extLst>
+          </p:cNvPr>
+          <p:cNvSpPr txBox="1"/>
+          <p:nvPr/>
+        </p:nvSpPr>
+        <p:spPr>
+          <a:xfrm>
+            <a:off x="-2" y="6121310"/>
+            <a:ext cx="10634474" cy="923330"/>
+          </a:xfrm>
+          <a:prstGeom prst="rect">
+            <a:avLst/>
+          </a:prstGeom>
+          <a:noFill/>
+        </p:spPr>
+        <p:txBody>
+          <a:bodyPr wrap="square" rtlCol="0">
+            <a:spAutoFit/>
+          </a:bodyPr>
+          <a:lstStyle/>
+          <a:p>
+            <a:r>
+              <a:rPr lang="it-IT" b="1" dirty="0">
+                <a:latin typeface="Neue Haas Grotesk Text Pro" panose="020B0504020202020204" pitchFamily="34" charset="0"/>
+              </a:rPr>
+              <a:t>Porta di Destinazione (80):</a:t>
+            </a:r>
+          </a:p>
+          <a:p>
+            <a:pPr lvl="1"/>
+            <a:r>
+              <a:rPr lang="it-IT" dirty="0">
+                <a:latin typeface="Neue Haas Grotesk Text Pro" panose="020B0504020202020204" pitchFamily="34" charset="0"/>
+              </a:rPr>
+              <a:t>È la porta interna su cui gira </a:t>
+            </a:r>
+            <a:r>
+              <a:rPr lang="it-IT" dirty="0" err="1">
+                <a:latin typeface="Neue Haas Grotesk Text Pro" panose="020B0504020202020204" pitchFamily="34" charset="0"/>
+              </a:rPr>
+              <a:t>Nginx</a:t>
+            </a:r>
+            <a:r>
+              <a:rPr lang="it-IT" dirty="0">
+                <a:latin typeface="Neue Haas Grotesk Text Pro" panose="020B0504020202020204" pitchFamily="34" charset="0"/>
+              </a:rPr>
+              <a:t> Alpine dentro il container del </a:t>
+            </a:r>
+            <a:r>
+              <a:rPr lang="it-IT" dirty="0" err="1">
+                <a:latin typeface="Neue Haas Grotesk Text Pro" panose="020B0504020202020204" pitchFamily="34" charset="0"/>
+              </a:rPr>
+              <a:t>frontend</a:t>
+            </a:r>
+            <a:r>
+              <a:rPr lang="it-IT" dirty="0">
+                <a:latin typeface="Neue Haas Grotesk Text Pro" panose="020B0504020202020204" pitchFamily="34" charset="0"/>
+              </a:rPr>
+              <a:t>.</a:t>
+            </a:r>
+          </a:p>
+          <a:p>
+            <a:endParaRPr lang="it-IT" dirty="0"/>
           </a:p>
         </p:txBody>
       </p:sp>
     </p:spTree>
     <p:extLst>
       <p:ext uri="{BB962C8B-B14F-4D97-AF65-F5344CB8AC3E}">
-        <p14:creationId xmlns:p14="http://schemas.microsoft.com/office/powerpoint/2010/main" val="3003246572"/>
+        <p14:creationId xmlns:p14="http://schemas.microsoft.com/office/powerpoint/2010/main" val="3404905769"/>
       </p:ext>
     </p:extLst>
   </p:cSld>
@@ -7513,6 +8884,1991 @@
     <p:extLst>
       <p:ext uri="{BB962C8B-B14F-4D97-AF65-F5344CB8AC3E}">
         <p14:creationId xmlns:p14="http://schemas.microsoft.com/office/powerpoint/2010/main" val="339079353"/>
+      </p:ext>
+    </p:extLst>
+  </p:cSld>
+  <p:clrMapOvr>
+    <a:masterClrMapping/>
+  </p:clrMapOvr>
+</p:sld>
+</file>
+
+<file path=ppt/slides/slide20.xml><?xml version="1.0" encoding="utf-8"?>
+<p:sld xmlns:a="http://schemas.openxmlformats.org/drawingml/2006/main" xmlns:r="http://schemas.openxmlformats.org/officeDocument/2006/relationships" xmlns:p="http://schemas.openxmlformats.org/presentationml/2006/main">
+  <p:cSld>
+    <p:spTree>
+      <p:nvGrpSpPr>
+        <p:cNvPr id="1" name="">
+          <a:extLst>
+            <a:ext uri="{FF2B5EF4-FFF2-40B4-BE49-F238E27FC236}">
+              <a16:creationId xmlns:a16="http://schemas.microsoft.com/office/drawing/2014/main" id="{E305ABCA-8791-0468-27D3-CD290B76DEB5}"/>
+            </a:ext>
+          </a:extLst>
+        </p:cNvPr>
+        <p:cNvGrpSpPr/>
+        <p:nvPr/>
+      </p:nvGrpSpPr>
+      <p:grpSpPr>
+        <a:xfrm>
+          <a:off x="0" y="0"/>
+          <a:ext cx="0" cy="0"/>
+          <a:chOff x="0" y="0"/>
+          <a:chExt cx="0" cy="0"/>
+        </a:xfrm>
+      </p:grpSpPr>
+      <p:sp>
+        <p:nvSpPr>
+          <p:cNvPr id="2" name="Titolo della lezione">
+            <a:extLst>
+              <a:ext uri="{FF2B5EF4-FFF2-40B4-BE49-F238E27FC236}">
+                <a16:creationId xmlns:a16="http://schemas.microsoft.com/office/drawing/2014/main" id="{6ADE954E-CAA5-C594-3838-82A56D033E73}"/>
+              </a:ext>
+            </a:extLst>
+          </p:cNvPr>
+          <p:cNvSpPr>
+            <a:spLocks noGrp="1"/>
+          </p:cNvSpPr>
+          <p:nvPr>
+            <p:ph type="title"/>
+          </p:nvPr>
+        </p:nvSpPr>
+        <p:spPr>
+          <a:xfrm>
+            <a:off x="838200" y="831206"/>
+            <a:ext cx="10515600" cy="314198"/>
+          </a:xfrm>
+        </p:spPr>
+        <p:txBody>
+          <a:bodyPr/>
+          <a:lstStyle/>
+          <a:p>
+            <a:r>
+              <a:rPr lang="it-IT" dirty="0"/>
+              <a:t>Slide 18: Step 10/3 – Configurazione Visuale dell'Host in </a:t>
+            </a:r>
+            <a:r>
+              <a:rPr lang="it-IT" dirty="0" err="1"/>
+              <a:t>Nginx</a:t>
+            </a:r>
+            <a:r>
+              <a:rPr lang="it-IT" dirty="0"/>
+              <a:t> Proxy Manager(</a:t>
+            </a:r>
+            <a:r>
+              <a:rPr lang="it-IT" dirty="0" err="1"/>
+              <a:t>Prod</a:t>
+            </a:r>
+            <a:r>
+              <a:rPr lang="it-IT" dirty="0"/>
+              <a:t>)</a:t>
+            </a:r>
+          </a:p>
+        </p:txBody>
+      </p:sp>
+      <p:sp>
+        <p:nvSpPr>
+          <p:cNvPr id="3" name="Contenuto della lezione">
+            <a:extLst>
+              <a:ext uri="{FF2B5EF4-FFF2-40B4-BE49-F238E27FC236}">
+                <a16:creationId xmlns:a16="http://schemas.microsoft.com/office/drawing/2014/main" id="{700420B9-F7A6-0AAC-4D6F-70CD5CDF9DC8}"/>
+              </a:ext>
+            </a:extLst>
+          </p:cNvPr>
+          <p:cNvSpPr>
+            <a:spLocks noGrp="1"/>
+          </p:cNvSpPr>
+          <p:nvPr>
+            <p:ph idx="1"/>
+          </p:nvPr>
+        </p:nvSpPr>
+        <p:spPr>
+          <a:xfrm>
+            <a:off x="-1" y="1552981"/>
+            <a:ext cx="7565135" cy="4803369"/>
+          </a:xfrm>
+        </p:spPr>
+        <p:txBody>
+          <a:bodyPr/>
+          <a:lstStyle/>
+          <a:p>
+            <a:r>
+              <a:rPr lang="it-IT" b="1" dirty="0"/>
+              <a:t>Scheda "Percorsi Personalizzati" (Custom Locations)</a:t>
+            </a:r>
+          </a:p>
+          <a:p>
+            <a:r>
+              <a:rPr lang="it-IT" dirty="0"/>
+              <a:t>Questa schermata serve a creare un'</a:t>
+            </a:r>
+            <a:r>
+              <a:rPr lang="it-IT" b="1" dirty="0"/>
+              <a:t>eccezione alla regola precedente</a:t>
+            </a:r>
+            <a:r>
+              <a:rPr lang="it-IT" dirty="0"/>
+              <a:t>. Dice a </a:t>
+            </a:r>
+            <a:r>
+              <a:rPr lang="it-IT" dirty="0" err="1"/>
+              <a:t>Nginx</a:t>
+            </a:r>
+            <a:r>
+              <a:rPr lang="it-IT" dirty="0"/>
+              <a:t>: </a:t>
+            </a:r>
+            <a:r>
+              <a:rPr lang="it-IT" i="1" dirty="0"/>
+              <a:t>"Fai tutto quello che abbiamo detto prima, A MENO CHE l'utente non stia cercando di chiamare una rotta specifica."</a:t>
+            </a:r>
+            <a:endParaRPr lang="it-IT" dirty="0"/>
+          </a:p>
+          <a:p>
+            <a:r>
+              <a:rPr lang="it-IT" b="1" dirty="0"/>
+              <a:t>Location (/api):</a:t>
+            </a:r>
+            <a:endParaRPr lang="it-IT" dirty="0"/>
+          </a:p>
+          <a:p>
+            <a:pPr lvl="1"/>
+            <a:r>
+              <a:rPr lang="it-IT" sz="1800" i="1" dirty="0">
+                <a:latin typeface="Neue Haas Grotesk Text Pro" panose="020B0504020202020204" pitchFamily="34" charset="0"/>
+              </a:rPr>
+              <a:t>È il percorso "sentinella". Se il </a:t>
+            </a:r>
+            <a:r>
+              <a:rPr lang="it-IT" sz="1800" i="1" dirty="0" err="1">
+                <a:latin typeface="Neue Haas Grotesk Text Pro" panose="020B0504020202020204" pitchFamily="34" charset="0"/>
+              </a:rPr>
+              <a:t>frontend</a:t>
+            </a:r>
+            <a:r>
+              <a:rPr lang="it-IT" sz="1800" i="1" dirty="0">
+                <a:latin typeface="Neue Haas Grotesk Text Pro" panose="020B0504020202020204" pitchFamily="34" charset="0"/>
+              </a:rPr>
+              <a:t> React fa una chiamata che inizia con /api (come il tuo fetch('/api/utenti')), questa regola scatta e ruba la priorità al </a:t>
+            </a:r>
+            <a:r>
+              <a:rPr lang="it-IT" sz="1800" i="1" dirty="0" err="1">
+                <a:latin typeface="Neue Haas Grotesk Text Pro" panose="020B0504020202020204" pitchFamily="34" charset="0"/>
+              </a:rPr>
+              <a:t>frontend</a:t>
+            </a:r>
+            <a:r>
+              <a:rPr lang="it-IT" sz="1800" i="1" dirty="0">
+                <a:latin typeface="Neue Haas Grotesk Text Pro" panose="020B0504020202020204" pitchFamily="34" charset="0"/>
+              </a:rPr>
+              <a:t>.</a:t>
+            </a:r>
+          </a:p>
+          <a:p>
+            <a:r>
+              <a:rPr lang="it-IT" b="1" dirty="0"/>
+              <a:t>Schema (http):</a:t>
+            </a:r>
+            <a:endParaRPr lang="it-IT" dirty="0"/>
+          </a:p>
+          <a:p>
+            <a:pPr lvl="1"/>
+            <a:r>
+              <a:rPr lang="it-IT" sz="1800" i="1" dirty="0">
+                <a:latin typeface="Neue Haas Grotesk Text Pro" panose="020B0504020202020204" pitchFamily="34" charset="0"/>
+              </a:rPr>
+              <a:t>La comunicazione interna tra i container Docker viaggia in HTTP semplice.</a:t>
+            </a:r>
+          </a:p>
+          <a:p>
+            <a:r>
+              <a:rPr lang="it-IT" b="1" dirty="0" err="1"/>
+              <a:t>Hostname</a:t>
+            </a:r>
+            <a:r>
+              <a:rPr lang="it-IT" b="1" dirty="0"/>
+              <a:t> / IP di Destinazione (</a:t>
+            </a:r>
+            <a:r>
+              <a:rPr lang="it-IT" b="1" dirty="0" err="1"/>
+              <a:t>enterprise-backend</a:t>
+            </a:r>
+            <a:r>
+              <a:rPr lang="it-IT" b="1" dirty="0"/>
+              <a:t>):</a:t>
+            </a:r>
+            <a:endParaRPr lang="it-IT" dirty="0"/>
+          </a:p>
+          <a:p>
+            <a:pPr lvl="1"/>
+            <a:r>
+              <a:rPr lang="it-IT" sz="1800" i="1" dirty="0">
+                <a:latin typeface="Neue Haas Grotesk Text Pro" panose="020B0504020202020204" pitchFamily="34" charset="0"/>
+              </a:rPr>
+              <a:t>Indica a quale container deviare la chiamata. Invece di mandarla al </a:t>
+            </a:r>
+            <a:r>
+              <a:rPr lang="it-IT" sz="1800" i="1" dirty="0" err="1">
+                <a:latin typeface="Neue Haas Grotesk Text Pro" panose="020B0504020202020204" pitchFamily="34" charset="0"/>
+              </a:rPr>
+              <a:t>frontend</a:t>
+            </a:r>
+            <a:r>
+              <a:rPr lang="it-IT" sz="1800" i="1" dirty="0">
+                <a:latin typeface="Neue Haas Grotesk Text Pro" panose="020B0504020202020204" pitchFamily="34" charset="0"/>
+              </a:rPr>
+              <a:t>, la spinge dentro il container di Spring Boot (</a:t>
+            </a:r>
+            <a:r>
+              <a:rPr lang="it-IT" sz="1800" i="1" dirty="0" err="1">
+                <a:latin typeface="Neue Haas Grotesk Text Pro" panose="020B0504020202020204" pitchFamily="34" charset="0"/>
+              </a:rPr>
+              <a:t>enterprise-backend</a:t>
+            </a:r>
+            <a:r>
+              <a:rPr lang="it-IT" sz="1800" i="1" dirty="0">
+                <a:latin typeface="Neue Haas Grotesk Text Pro" panose="020B0504020202020204" pitchFamily="34" charset="0"/>
+              </a:rPr>
+              <a:t>).</a:t>
+            </a:r>
+          </a:p>
+          <a:p>
+            <a:r>
+              <a:rPr lang="it-IT" b="1" dirty="0"/>
+              <a:t>Porta di Destinazione (8080):</a:t>
+            </a:r>
+            <a:endParaRPr lang="it-IT" dirty="0"/>
+          </a:p>
+          <a:p>
+            <a:pPr lvl="1"/>
+            <a:r>
+              <a:rPr lang="it-IT" sz="1800" i="1" dirty="0">
+                <a:latin typeface="Neue Haas Grotesk Text Pro" panose="020B0504020202020204" pitchFamily="34" charset="0"/>
+              </a:rPr>
+              <a:t>È la porta standard su cui Tomcat e Spring Boot rimangono in ascolto per ricevere i dati.</a:t>
+            </a:r>
+          </a:p>
+          <a:p>
+            <a:endParaRPr lang="it-IT" dirty="0"/>
+          </a:p>
+        </p:txBody>
+      </p:sp>
+      <p:sp>
+        <p:nvSpPr>
+          <p:cNvPr id="12" name="Segnaposto numero diapositiva 11">
+            <a:extLst>
+              <a:ext uri="{FF2B5EF4-FFF2-40B4-BE49-F238E27FC236}">
+                <a16:creationId xmlns:a16="http://schemas.microsoft.com/office/drawing/2014/main" id="{FAD8DF8A-02A5-CF0A-F86B-F3C825FDBF73}"/>
+              </a:ext>
+            </a:extLst>
+          </p:cNvPr>
+          <p:cNvSpPr>
+            <a:spLocks noGrp="1"/>
+          </p:cNvSpPr>
+          <p:nvPr>
+            <p:ph type="sldNum" sz="quarter" idx="12"/>
+          </p:nvPr>
+        </p:nvSpPr>
+        <p:spPr/>
+        <p:txBody>
+          <a:bodyPr/>
+          <a:lstStyle/>
+          <a:p>
+            <a:r>
+              <a:rPr lang="it-IT" dirty="0"/>
+              <a:t>18</a:t>
+            </a:r>
+          </a:p>
+        </p:txBody>
+      </p:sp>
+      <p:pic>
+        <p:nvPicPr>
+          <p:cNvPr id="6" name="Immagine 5">
+            <a:extLst>
+              <a:ext uri="{FF2B5EF4-FFF2-40B4-BE49-F238E27FC236}">
+                <a16:creationId xmlns:a16="http://schemas.microsoft.com/office/drawing/2014/main" id="{109EC334-FE19-B16C-F8CB-BE3859FB1ED4}"/>
+              </a:ext>
+            </a:extLst>
+          </p:cNvPr>
+          <p:cNvPicPr>
+            <a:picLocks noChangeAspect="1"/>
+          </p:cNvPicPr>
+          <p:nvPr/>
+        </p:nvPicPr>
+        <p:blipFill>
+          <a:blip r:embed="rId3">
+            <a:extLst>
+              <a:ext uri="{28A0092B-C50C-407E-A947-70E740481C1C}">
+                <a14:useLocalDpi xmlns:a14="http://schemas.microsoft.com/office/drawing/2010/main" val="0"/>
+              </a:ext>
+            </a:extLst>
+          </a:blip>
+          <a:stretch>
+            <a:fillRect/>
+          </a:stretch>
+        </p:blipFill>
+        <p:spPr>
+          <a:xfrm>
+            <a:off x="7565134" y="1552981"/>
+            <a:ext cx="4626866" cy="2576424"/>
+          </a:xfrm>
+          <a:prstGeom prst="rect">
+            <a:avLst/>
+          </a:prstGeom>
+        </p:spPr>
+      </p:pic>
+    </p:spTree>
+    <p:extLst>
+      <p:ext uri="{BB962C8B-B14F-4D97-AF65-F5344CB8AC3E}">
+        <p14:creationId xmlns:p14="http://schemas.microsoft.com/office/powerpoint/2010/main" val="3283993567"/>
+      </p:ext>
+    </p:extLst>
+  </p:cSld>
+  <p:clrMapOvr>
+    <a:masterClrMapping/>
+  </p:clrMapOvr>
+</p:sld>
+</file>
+
+<file path=ppt/slides/slide21.xml><?xml version="1.0" encoding="utf-8"?>
+<p:sld xmlns:a="http://schemas.openxmlformats.org/drawingml/2006/main" xmlns:r="http://schemas.openxmlformats.org/officeDocument/2006/relationships" xmlns:p="http://schemas.openxmlformats.org/presentationml/2006/main">
+  <p:cSld>
+    <p:spTree>
+      <p:nvGrpSpPr>
+        <p:cNvPr id="1" name="">
+          <a:extLst>
+            <a:ext uri="{FF2B5EF4-FFF2-40B4-BE49-F238E27FC236}">
+              <a16:creationId xmlns:a16="http://schemas.microsoft.com/office/drawing/2014/main" id="{F48BF997-018D-B30A-A75E-94C38D8D09B2}"/>
+            </a:ext>
+          </a:extLst>
+        </p:cNvPr>
+        <p:cNvGrpSpPr/>
+        <p:nvPr/>
+      </p:nvGrpSpPr>
+      <p:grpSpPr>
+        <a:xfrm>
+          <a:off x="0" y="0"/>
+          <a:ext cx="0" cy="0"/>
+          <a:chOff x="0" y="0"/>
+          <a:chExt cx="0" cy="0"/>
+        </a:xfrm>
+      </p:grpSpPr>
+      <p:sp>
+        <p:nvSpPr>
+          <p:cNvPr id="2" name="Titolo della lezione">
+            <a:extLst>
+              <a:ext uri="{FF2B5EF4-FFF2-40B4-BE49-F238E27FC236}">
+                <a16:creationId xmlns:a16="http://schemas.microsoft.com/office/drawing/2014/main" id="{F35F6826-6511-B4AC-31FD-A8FC258A4F9A}"/>
+              </a:ext>
+            </a:extLst>
+          </p:cNvPr>
+          <p:cNvSpPr>
+            <a:spLocks noGrp="1"/>
+          </p:cNvSpPr>
+          <p:nvPr>
+            <p:ph type="title"/>
+          </p:nvPr>
+        </p:nvSpPr>
+        <p:spPr>
+          <a:xfrm>
+            <a:off x="838200" y="831206"/>
+            <a:ext cx="10515600" cy="314198"/>
+          </a:xfrm>
+        </p:spPr>
+        <p:txBody>
+          <a:bodyPr/>
+          <a:lstStyle/>
+          <a:p>
+            <a:r>
+              <a:rPr lang="it-IT" dirty="0"/>
+              <a:t>Slide 19: Step 11 - Salvare nel DNS locale</a:t>
+            </a:r>
+          </a:p>
+        </p:txBody>
+      </p:sp>
+      <p:sp>
+        <p:nvSpPr>
+          <p:cNvPr id="3" name="Contenuto della lezione">
+            <a:extLst>
+              <a:ext uri="{FF2B5EF4-FFF2-40B4-BE49-F238E27FC236}">
+                <a16:creationId xmlns:a16="http://schemas.microsoft.com/office/drawing/2014/main" id="{FFF00BF6-B752-5AAF-D074-ED998A2BDFAF}"/>
+              </a:ext>
+            </a:extLst>
+          </p:cNvPr>
+          <p:cNvSpPr>
+            <a:spLocks noGrp="1"/>
+          </p:cNvSpPr>
+          <p:nvPr>
+            <p:ph idx="1"/>
+          </p:nvPr>
+        </p:nvSpPr>
+        <p:spPr>
+          <a:xfrm>
+            <a:off x="838201" y="1261008"/>
+            <a:ext cx="10515599" cy="4803369"/>
+          </a:xfrm>
+        </p:spPr>
+        <p:txBody>
+          <a:bodyPr/>
+          <a:lstStyle/>
+          <a:p>
+            <a:r>
+              <a:rPr lang="it-IT" dirty="0"/>
+              <a:t>Usando </a:t>
+            </a:r>
+            <a:r>
+              <a:rPr lang="it-IT" dirty="0" err="1"/>
+              <a:t>PowerShell</a:t>
+            </a:r>
+            <a:r>
+              <a:rPr lang="it-IT" dirty="0"/>
+              <a:t> come amministratore:</a:t>
+            </a:r>
+          </a:p>
+          <a:p>
+            <a:r>
+              <a:rPr lang="en-US" dirty="0">
+                <a:solidFill>
+                  <a:srgbClr val="171FE2"/>
+                </a:solidFill>
+                <a:latin typeface="Consolas" panose="020B0609020204030204" pitchFamily="49" charset="0"/>
+              </a:rPr>
+              <a:t>notepad c:\windows\system32\drivers\etc\hosts</a:t>
+            </a:r>
+          </a:p>
+          <a:p>
+            <a:r>
+              <a:rPr lang="en-US" dirty="0" err="1"/>
+              <a:t>Aggiungere</a:t>
+            </a:r>
+            <a:r>
+              <a:rPr lang="en-US" dirty="0"/>
+              <a:t> la </a:t>
+            </a:r>
+            <a:r>
+              <a:rPr lang="en-US" dirty="0" err="1"/>
+              <a:t>coppia</a:t>
+            </a:r>
+            <a:r>
+              <a:rPr lang="en-US" dirty="0"/>
+              <a:t>:</a:t>
+            </a:r>
+          </a:p>
+          <a:p>
+            <a:r>
+              <a:rPr lang="en-US" dirty="0">
+                <a:solidFill>
+                  <a:srgbClr val="171FE2"/>
+                </a:solidFill>
+                <a:latin typeface="Consolas" panose="020B0609020204030204" pitchFamily="49" charset="0"/>
+              </a:rPr>
+              <a:t>127.0.0.1 </a:t>
+            </a:r>
+            <a:r>
+              <a:rPr lang="en-US" dirty="0" err="1">
+                <a:solidFill>
+                  <a:srgbClr val="171FE2"/>
+                </a:solidFill>
+                <a:latin typeface="Consolas" panose="020B0609020204030204" pitchFamily="49" charset="0"/>
+              </a:rPr>
+              <a:t>azienda.skillfactory.local</a:t>
+            </a:r>
+            <a:endParaRPr lang="en-US" dirty="0">
+              <a:solidFill>
+                <a:srgbClr val="171FE2"/>
+              </a:solidFill>
+              <a:latin typeface="Consolas" panose="020B0609020204030204" pitchFamily="49" charset="0"/>
+            </a:endParaRPr>
+          </a:p>
+          <a:p>
+            <a:endParaRPr lang="it-IT" dirty="0">
+              <a:solidFill>
+                <a:srgbClr val="171FE2"/>
+              </a:solidFill>
+              <a:latin typeface="Consolas" panose="020B0609020204030204" pitchFamily="49" charset="0"/>
+            </a:endParaRPr>
+          </a:p>
+        </p:txBody>
+      </p:sp>
+      <p:sp>
+        <p:nvSpPr>
+          <p:cNvPr id="12" name="Segnaposto numero diapositiva 11">
+            <a:extLst>
+              <a:ext uri="{FF2B5EF4-FFF2-40B4-BE49-F238E27FC236}">
+                <a16:creationId xmlns:a16="http://schemas.microsoft.com/office/drawing/2014/main" id="{4B79CD14-C9DC-5992-42CD-903B9A374D5A}"/>
+              </a:ext>
+            </a:extLst>
+          </p:cNvPr>
+          <p:cNvSpPr>
+            <a:spLocks noGrp="1"/>
+          </p:cNvSpPr>
+          <p:nvPr>
+            <p:ph type="sldNum" sz="quarter" idx="12"/>
+          </p:nvPr>
+        </p:nvSpPr>
+        <p:spPr/>
+        <p:txBody>
+          <a:bodyPr/>
+          <a:lstStyle/>
+          <a:p>
+            <a:r>
+              <a:rPr lang="it-IT" dirty="0"/>
+              <a:t>19</a:t>
+            </a:r>
+          </a:p>
+        </p:txBody>
+      </p:sp>
+      <p:pic>
+        <p:nvPicPr>
+          <p:cNvPr id="5" name="Immagine 4">
+            <a:extLst>
+              <a:ext uri="{FF2B5EF4-FFF2-40B4-BE49-F238E27FC236}">
+                <a16:creationId xmlns:a16="http://schemas.microsoft.com/office/drawing/2014/main" id="{CA839DDD-9890-ADD3-670C-95482EC51A0D}"/>
+              </a:ext>
+            </a:extLst>
+          </p:cNvPr>
+          <p:cNvPicPr>
+            <a:picLocks noChangeAspect="1"/>
+          </p:cNvPicPr>
+          <p:nvPr/>
+        </p:nvPicPr>
+        <p:blipFill>
+          <a:blip r:embed="rId3">
+            <a:extLst>
+              <a:ext uri="{28A0092B-C50C-407E-A947-70E740481C1C}">
+                <a14:useLocalDpi xmlns:a14="http://schemas.microsoft.com/office/drawing/2010/main" val="0"/>
+              </a:ext>
+            </a:extLst>
+          </a:blip>
+          <a:stretch>
+            <a:fillRect/>
+          </a:stretch>
+        </p:blipFill>
+        <p:spPr>
+          <a:xfrm>
+            <a:off x="6866782" y="724733"/>
+            <a:ext cx="5325218" cy="4439270"/>
+          </a:xfrm>
+          <a:prstGeom prst="rect">
+            <a:avLst/>
+          </a:prstGeom>
+        </p:spPr>
+      </p:pic>
+      <p:pic>
+        <p:nvPicPr>
+          <p:cNvPr id="7" name="Immagine 6">
+            <a:extLst>
+              <a:ext uri="{FF2B5EF4-FFF2-40B4-BE49-F238E27FC236}">
+                <a16:creationId xmlns:a16="http://schemas.microsoft.com/office/drawing/2014/main" id="{5C15B9F9-6C67-29DF-5742-36E31256B357}"/>
+              </a:ext>
+            </a:extLst>
+          </p:cNvPr>
+          <p:cNvPicPr>
+            <a:picLocks noChangeAspect="1"/>
+          </p:cNvPicPr>
+          <p:nvPr/>
+        </p:nvPicPr>
+        <p:blipFill>
+          <a:blip r:embed="rId4">
+            <a:extLst>
+              <a:ext uri="{28A0092B-C50C-407E-A947-70E740481C1C}">
+                <a14:useLocalDpi xmlns:a14="http://schemas.microsoft.com/office/drawing/2010/main" val="0"/>
+              </a:ext>
+            </a:extLst>
+          </a:blip>
+          <a:stretch>
+            <a:fillRect/>
+          </a:stretch>
+        </p:blipFill>
+        <p:spPr>
+          <a:xfrm>
+            <a:off x="1247656" y="3050431"/>
+            <a:ext cx="4429743" cy="3372321"/>
+          </a:xfrm>
+          <a:prstGeom prst="rect">
+            <a:avLst/>
+          </a:prstGeom>
+        </p:spPr>
+      </p:pic>
+    </p:spTree>
+    <p:extLst>
+      <p:ext uri="{BB962C8B-B14F-4D97-AF65-F5344CB8AC3E}">
+        <p14:creationId xmlns:p14="http://schemas.microsoft.com/office/powerpoint/2010/main" val="3107720076"/>
+      </p:ext>
+    </p:extLst>
+  </p:cSld>
+  <p:clrMapOvr>
+    <a:masterClrMapping/>
+  </p:clrMapOvr>
+</p:sld>
+</file>
+
+<file path=ppt/slides/slide22.xml><?xml version="1.0" encoding="utf-8"?>
+<p:sld xmlns:a="http://schemas.openxmlformats.org/drawingml/2006/main" xmlns:r="http://schemas.openxmlformats.org/officeDocument/2006/relationships" xmlns:p="http://schemas.openxmlformats.org/presentationml/2006/main">
+  <p:cSld>
+    <p:spTree>
+      <p:nvGrpSpPr>
+        <p:cNvPr id="1" name="">
+          <a:extLst>
+            <a:ext uri="{FF2B5EF4-FFF2-40B4-BE49-F238E27FC236}">
+              <a16:creationId xmlns:a16="http://schemas.microsoft.com/office/drawing/2014/main" id="{D4E1232A-7F75-983E-087C-A9AA8CE51F91}"/>
+            </a:ext>
+          </a:extLst>
+        </p:cNvPr>
+        <p:cNvGrpSpPr/>
+        <p:nvPr/>
+      </p:nvGrpSpPr>
+      <p:grpSpPr>
+        <a:xfrm>
+          <a:off x="0" y="0"/>
+          <a:ext cx="0" cy="0"/>
+          <a:chOff x="0" y="0"/>
+          <a:chExt cx="0" cy="0"/>
+        </a:xfrm>
+      </p:grpSpPr>
+      <p:sp>
+        <p:nvSpPr>
+          <p:cNvPr id="2" name="Titolo della lezione">
+            <a:extLst>
+              <a:ext uri="{FF2B5EF4-FFF2-40B4-BE49-F238E27FC236}">
+                <a16:creationId xmlns:a16="http://schemas.microsoft.com/office/drawing/2014/main" id="{09D4308E-5D39-A805-502F-13DFFC9BD137}"/>
+              </a:ext>
+            </a:extLst>
+          </p:cNvPr>
+          <p:cNvSpPr>
+            <a:spLocks noGrp="1"/>
+          </p:cNvSpPr>
+          <p:nvPr>
+            <p:ph type="title"/>
+          </p:nvPr>
+        </p:nvSpPr>
+        <p:spPr>
+          <a:xfrm>
+            <a:off x="838200" y="831206"/>
+            <a:ext cx="10515600" cy="314198"/>
+          </a:xfrm>
+        </p:spPr>
+        <p:txBody>
+          <a:bodyPr/>
+          <a:lstStyle/>
+          <a:p>
+            <a:r>
+              <a:rPr lang="it-IT" dirty="0"/>
+              <a:t>Slide 20: Step 12 - Generazione del certificato SSL</a:t>
+            </a:r>
+          </a:p>
+        </p:txBody>
+      </p:sp>
+      <p:sp>
+        <p:nvSpPr>
+          <p:cNvPr id="3" name="Contenuto della lezione">
+            <a:extLst>
+              <a:ext uri="{FF2B5EF4-FFF2-40B4-BE49-F238E27FC236}">
+                <a16:creationId xmlns:a16="http://schemas.microsoft.com/office/drawing/2014/main" id="{9584B10E-9A1E-698F-A8D9-12CE8CA7FA07}"/>
+              </a:ext>
+            </a:extLst>
+          </p:cNvPr>
+          <p:cNvSpPr>
+            <a:spLocks noGrp="1"/>
+          </p:cNvSpPr>
+          <p:nvPr>
+            <p:ph idx="1"/>
+          </p:nvPr>
+        </p:nvSpPr>
+        <p:spPr>
+          <a:xfrm>
+            <a:off x="838201" y="1261008"/>
+            <a:ext cx="10515599" cy="4803369"/>
+          </a:xfrm>
+        </p:spPr>
+        <p:txBody>
+          <a:bodyPr/>
+          <a:lstStyle/>
+          <a:p>
+            <a:r>
+              <a:rPr lang="it-IT" dirty="0"/>
+              <a:t>Visto che </a:t>
+            </a:r>
+            <a:r>
+              <a:rPr lang="it-IT" dirty="0" err="1"/>
+              <a:t>azienda.skillfactory.local</a:t>
+            </a:r>
+            <a:r>
+              <a:rPr lang="it-IT" dirty="0"/>
+              <a:t> è un dominio locale (finto) inventato nel file </a:t>
+            </a:r>
+            <a:r>
+              <a:rPr lang="it-IT" dirty="0" err="1"/>
+              <a:t>hosts</a:t>
+            </a:r>
+            <a:r>
+              <a:rPr lang="it-IT" dirty="0"/>
+              <a:t>, non possiamo chiedere un certificato vero a </a:t>
+            </a:r>
+            <a:r>
+              <a:rPr lang="it-IT" dirty="0" err="1"/>
+              <a:t>Let's</a:t>
+            </a:r>
+            <a:r>
+              <a:rPr lang="it-IT" dirty="0"/>
+              <a:t> </a:t>
+            </a:r>
+            <a:r>
+              <a:rPr lang="it-IT" dirty="0" err="1"/>
+              <a:t>Encrypt</a:t>
+            </a:r>
+            <a:r>
+              <a:rPr lang="it-IT" dirty="0"/>
+              <a:t>. </a:t>
+            </a:r>
+          </a:p>
+          <a:p>
+            <a:r>
+              <a:rPr lang="it-IT" dirty="0"/>
+              <a:t>Creeremo quindi un </a:t>
+            </a:r>
+            <a:r>
+              <a:rPr lang="it-IT" b="1" dirty="0"/>
+              <a:t>certificato auto-firmato (Self-</a:t>
+            </a:r>
+            <a:r>
+              <a:rPr lang="it-IT" b="1" dirty="0" err="1"/>
+              <a:t>Signed</a:t>
+            </a:r>
+            <a:r>
+              <a:rPr lang="it-IT" b="1" dirty="0"/>
+              <a:t>)</a:t>
+            </a:r>
+            <a:r>
+              <a:rPr lang="it-IT" dirty="0"/>
+              <a:t> direttamente nella cartella del laboratorio e lo daremo in pasto a </a:t>
+            </a:r>
+            <a:r>
+              <a:rPr lang="it-IT" dirty="0" err="1"/>
+              <a:t>Nginx</a:t>
+            </a:r>
+            <a:r>
+              <a:rPr lang="it-IT" dirty="0"/>
+              <a:t> Proxy Manager.</a:t>
+            </a:r>
+          </a:p>
+          <a:p>
+            <a:r>
+              <a:rPr lang="it-IT" dirty="0"/>
+              <a:t>Ecco i 3 passaggi definitivi per vedere il lucchetto (o lo scudo di sicurezza) su HTTPS.</a:t>
+            </a:r>
+          </a:p>
+          <a:p>
+            <a:r>
+              <a:rPr lang="it-IT" b="1" dirty="0"/>
+              <a:t>Passo 1: Genera il certificato (Chiave + Certificato)</a:t>
+            </a:r>
+          </a:p>
+          <a:p>
+            <a:r>
+              <a:rPr lang="it-IT" dirty="0"/>
+              <a:t>Per farlo senza installare programmi complessi, possiamo usare una riga di comando al volo.</a:t>
+            </a:r>
+          </a:p>
+          <a:p>
+            <a:r>
+              <a:rPr lang="it-IT" dirty="0"/>
+              <a:t>Usando </a:t>
+            </a:r>
+            <a:r>
+              <a:rPr lang="it-IT" b="1" dirty="0" err="1"/>
+              <a:t>Git</a:t>
+            </a:r>
+            <a:r>
+              <a:rPr lang="it-IT" b="1" dirty="0"/>
+              <a:t> Bash</a:t>
+            </a:r>
+            <a:r>
+              <a:rPr lang="it-IT" dirty="0"/>
+              <a:t> incolliamo questo comando unico per generare i due file di sicurezza (validi per 365 giorni):</a:t>
+            </a:r>
+          </a:p>
+          <a:p>
+            <a:r>
+              <a:rPr lang="it-IT" dirty="0" err="1">
+                <a:latin typeface="Consolas" panose="020B0609020204030204" pitchFamily="49" charset="0"/>
+              </a:rPr>
+              <a:t>openssl</a:t>
+            </a:r>
+            <a:r>
+              <a:rPr lang="it-IT" dirty="0">
+                <a:latin typeface="Consolas" panose="020B0609020204030204" pitchFamily="49" charset="0"/>
+              </a:rPr>
+              <a:t> </a:t>
+            </a:r>
+            <a:r>
+              <a:rPr lang="it-IT" dirty="0" err="1">
+                <a:latin typeface="Consolas" panose="020B0609020204030204" pitchFamily="49" charset="0"/>
+              </a:rPr>
+              <a:t>req</a:t>
+            </a:r>
+            <a:r>
+              <a:rPr lang="it-IT" dirty="0">
+                <a:latin typeface="Consolas" panose="020B0609020204030204" pitchFamily="49" charset="0"/>
+              </a:rPr>
+              <a:t> -x509 -</a:t>
+            </a:r>
+            <a:r>
+              <a:rPr lang="it-IT" dirty="0" err="1">
+                <a:latin typeface="Consolas" panose="020B0609020204030204" pitchFamily="49" charset="0"/>
+              </a:rPr>
+              <a:t>nodes</a:t>
+            </a:r>
+            <a:r>
+              <a:rPr lang="it-IT" dirty="0">
+                <a:latin typeface="Consolas" panose="020B0609020204030204" pitchFamily="49" charset="0"/>
+              </a:rPr>
+              <a:t> -days 365 -</a:t>
+            </a:r>
+            <a:r>
+              <a:rPr lang="it-IT" dirty="0" err="1">
+                <a:latin typeface="Consolas" panose="020B0609020204030204" pitchFamily="49" charset="0"/>
+              </a:rPr>
+              <a:t>newkey</a:t>
+            </a:r>
+            <a:r>
+              <a:rPr lang="it-IT" dirty="0">
+                <a:latin typeface="Consolas" panose="020B0609020204030204" pitchFamily="49" charset="0"/>
+              </a:rPr>
+              <a:t> rsa:2048 -</a:t>
+            </a:r>
+            <a:r>
+              <a:rPr lang="it-IT" dirty="0" err="1">
+                <a:latin typeface="Consolas" panose="020B0609020204030204" pitchFamily="49" charset="0"/>
+              </a:rPr>
+              <a:t>keyout</a:t>
+            </a:r>
+            <a:r>
+              <a:rPr lang="it-IT" dirty="0">
+                <a:latin typeface="Consolas" panose="020B0609020204030204" pitchFamily="49" charset="0"/>
+              </a:rPr>
+              <a:t> </a:t>
+            </a:r>
+            <a:r>
+              <a:rPr lang="it-IT" dirty="0" err="1">
+                <a:latin typeface="Consolas" panose="020B0609020204030204" pitchFamily="49" charset="0"/>
+              </a:rPr>
+              <a:t>azienda.key</a:t>
+            </a:r>
+            <a:r>
+              <a:rPr lang="it-IT" dirty="0">
+                <a:latin typeface="Consolas" panose="020B0609020204030204" pitchFamily="49" charset="0"/>
+              </a:rPr>
+              <a:t> -out azienda.crt -</a:t>
+            </a:r>
+            <a:r>
+              <a:rPr lang="it-IT" dirty="0" err="1">
+                <a:latin typeface="Consolas" panose="020B0609020204030204" pitchFamily="49" charset="0"/>
+              </a:rPr>
+              <a:t>subj</a:t>
+            </a:r>
+            <a:r>
+              <a:rPr lang="it-IT" dirty="0">
+                <a:latin typeface="Consolas" panose="020B0609020204030204" pitchFamily="49" charset="0"/>
+              </a:rPr>
+              <a:t> "//CN=</a:t>
+            </a:r>
+            <a:r>
+              <a:rPr lang="it-IT" dirty="0" err="1">
+                <a:latin typeface="Consolas" panose="020B0609020204030204" pitchFamily="49" charset="0"/>
+              </a:rPr>
+              <a:t>azienda.skillfactory.local</a:t>
+            </a:r>
+            <a:r>
+              <a:rPr lang="it-IT" dirty="0">
+                <a:latin typeface="Consolas" panose="020B0609020204030204" pitchFamily="49" charset="0"/>
+              </a:rPr>
+              <a:t>"</a:t>
+            </a:r>
+          </a:p>
+          <a:p>
+            <a:r>
+              <a:rPr lang="it-IT" dirty="0">
+                <a:solidFill>
+                  <a:srgbClr val="171FE2"/>
+                </a:solidFill>
+              </a:rPr>
+              <a:t>Se vogliamo usare il comando per un altro esercizio basterà cambiare il valore del campo CN mettendo un nuovo dominio fittizio di terzo livello.</a:t>
+            </a:r>
+          </a:p>
+        </p:txBody>
+      </p:sp>
+      <p:sp>
+        <p:nvSpPr>
+          <p:cNvPr id="12" name="Segnaposto numero diapositiva 11">
+            <a:extLst>
+              <a:ext uri="{FF2B5EF4-FFF2-40B4-BE49-F238E27FC236}">
+                <a16:creationId xmlns:a16="http://schemas.microsoft.com/office/drawing/2014/main" id="{A159F0D5-EA4A-5D71-FAAD-E4D2B47A2D56}"/>
+              </a:ext>
+            </a:extLst>
+          </p:cNvPr>
+          <p:cNvSpPr>
+            <a:spLocks noGrp="1"/>
+          </p:cNvSpPr>
+          <p:nvPr>
+            <p:ph type="sldNum" sz="quarter" idx="12"/>
+          </p:nvPr>
+        </p:nvSpPr>
+        <p:spPr/>
+        <p:txBody>
+          <a:bodyPr/>
+          <a:lstStyle/>
+          <a:p>
+            <a:r>
+              <a:rPr lang="it-IT" dirty="0"/>
+              <a:t>20</a:t>
+            </a:r>
+          </a:p>
+        </p:txBody>
+      </p:sp>
+    </p:spTree>
+    <p:extLst>
+      <p:ext uri="{BB962C8B-B14F-4D97-AF65-F5344CB8AC3E}">
+        <p14:creationId xmlns:p14="http://schemas.microsoft.com/office/powerpoint/2010/main" val="2675544443"/>
+      </p:ext>
+    </p:extLst>
+  </p:cSld>
+  <p:clrMapOvr>
+    <a:masterClrMapping/>
+  </p:clrMapOvr>
+</p:sld>
+</file>
+
+<file path=ppt/slides/slide23.xml><?xml version="1.0" encoding="utf-8"?>
+<p:sld xmlns:a="http://schemas.openxmlformats.org/drawingml/2006/main" xmlns:r="http://schemas.openxmlformats.org/officeDocument/2006/relationships" xmlns:p="http://schemas.openxmlformats.org/presentationml/2006/main">
+  <p:cSld>
+    <p:spTree>
+      <p:nvGrpSpPr>
+        <p:cNvPr id="1" name="">
+          <a:extLst>
+            <a:ext uri="{FF2B5EF4-FFF2-40B4-BE49-F238E27FC236}">
+              <a16:creationId xmlns:a16="http://schemas.microsoft.com/office/drawing/2014/main" id="{A6DE6AD2-680B-E7C3-E8AF-BB2B14A57344}"/>
+            </a:ext>
+          </a:extLst>
+        </p:cNvPr>
+        <p:cNvGrpSpPr/>
+        <p:nvPr/>
+      </p:nvGrpSpPr>
+      <p:grpSpPr>
+        <a:xfrm>
+          <a:off x="0" y="0"/>
+          <a:ext cx="0" cy="0"/>
+          <a:chOff x="0" y="0"/>
+          <a:chExt cx="0" cy="0"/>
+        </a:xfrm>
+      </p:grpSpPr>
+      <p:sp>
+        <p:nvSpPr>
+          <p:cNvPr id="2" name="Titolo della lezione">
+            <a:extLst>
+              <a:ext uri="{FF2B5EF4-FFF2-40B4-BE49-F238E27FC236}">
+                <a16:creationId xmlns:a16="http://schemas.microsoft.com/office/drawing/2014/main" id="{EFFDD007-5F5A-B300-33E2-C6BD03E809CF}"/>
+              </a:ext>
+            </a:extLst>
+          </p:cNvPr>
+          <p:cNvSpPr>
+            <a:spLocks noGrp="1"/>
+          </p:cNvSpPr>
+          <p:nvPr>
+            <p:ph type="title"/>
+          </p:nvPr>
+        </p:nvSpPr>
+        <p:spPr>
+          <a:xfrm>
+            <a:off x="838200" y="831206"/>
+            <a:ext cx="10515600" cy="314198"/>
+          </a:xfrm>
+        </p:spPr>
+        <p:txBody>
+          <a:bodyPr/>
+          <a:lstStyle/>
+          <a:p>
+            <a:r>
+              <a:rPr lang="it-IT" dirty="0"/>
+              <a:t>Slide 21: Step 13 - Generazione del certificato SSL</a:t>
+            </a:r>
+          </a:p>
+        </p:txBody>
+      </p:sp>
+      <p:sp>
+        <p:nvSpPr>
+          <p:cNvPr id="3" name="Contenuto della lezione">
+            <a:extLst>
+              <a:ext uri="{FF2B5EF4-FFF2-40B4-BE49-F238E27FC236}">
+                <a16:creationId xmlns:a16="http://schemas.microsoft.com/office/drawing/2014/main" id="{BE89CE1C-705D-0D82-8C8B-854CC61DFC32}"/>
+              </a:ext>
+            </a:extLst>
+          </p:cNvPr>
+          <p:cNvSpPr>
+            <a:spLocks noGrp="1"/>
+          </p:cNvSpPr>
+          <p:nvPr>
+            <p:ph idx="1"/>
+          </p:nvPr>
+        </p:nvSpPr>
+        <p:spPr>
+          <a:xfrm>
+            <a:off x="838201" y="1261008"/>
+            <a:ext cx="10515599" cy="4803369"/>
+          </a:xfrm>
+        </p:spPr>
+        <p:txBody>
+          <a:bodyPr/>
+          <a:lstStyle/>
+          <a:p>
+            <a:r>
+              <a:rPr lang="it-IT" dirty="0"/>
+              <a:t>Ora che i due file (azienda.crt e </a:t>
+            </a:r>
+            <a:r>
+              <a:rPr lang="it-IT" dirty="0" err="1"/>
+              <a:t>azienda.key</a:t>
+            </a:r>
+            <a:r>
+              <a:rPr lang="it-IT" dirty="0"/>
+              <a:t>) sono apparsi nella cartella, dobbiamo solo fare l'ultimo passo: darli in pasto a </a:t>
+            </a:r>
+            <a:r>
+              <a:rPr lang="it-IT" b="1" dirty="0" err="1"/>
+              <a:t>Nginx</a:t>
+            </a:r>
+            <a:r>
+              <a:rPr lang="it-IT" b="1" dirty="0"/>
+              <a:t> Proxy Manager</a:t>
+            </a:r>
+            <a:r>
+              <a:rPr lang="it-IT" dirty="0"/>
+              <a:t> per attivare il lucchetto di sicurezza.</a:t>
+            </a:r>
+          </a:p>
+          <a:p>
+            <a:r>
+              <a:rPr lang="it-IT" b="1" dirty="0"/>
+              <a:t>1. Entra nel pannello di </a:t>
+            </a:r>
+            <a:r>
+              <a:rPr lang="it-IT" b="1" dirty="0" err="1"/>
+              <a:t>Nginx</a:t>
+            </a:r>
+            <a:r>
+              <a:rPr lang="it-IT" b="1" dirty="0"/>
+              <a:t> Proxy Manager</a:t>
+            </a:r>
+          </a:p>
+          <a:p>
+            <a:r>
+              <a:rPr lang="it-IT" dirty="0"/>
+              <a:t>Apri Google Chrome e vai all'indirizzo dove gestisci i tuoi proxy:  http://localhost:81 </a:t>
+            </a:r>
+          </a:p>
+          <a:p>
+            <a:r>
+              <a:rPr lang="it-IT" b="1" dirty="0"/>
+              <a:t>2. Carica i file dentro </a:t>
+            </a:r>
+            <a:r>
+              <a:rPr lang="it-IT" b="1" dirty="0" err="1"/>
+              <a:t>Nginx</a:t>
+            </a:r>
+            <a:r>
+              <a:rPr lang="it-IT" b="1" dirty="0"/>
+              <a:t> Proxy Manager</a:t>
+            </a:r>
+          </a:p>
+          <a:p>
+            <a:r>
+              <a:rPr lang="it-IT" dirty="0"/>
+              <a:t>Dobbiamo spiegare al proxy che questi due nuovi file sono il tuo certificato.</a:t>
+            </a:r>
+          </a:p>
+          <a:p>
+            <a:r>
+              <a:rPr lang="it-IT" dirty="0"/>
+              <a:t>In alto nella barra dei menu, clicca sulla voce </a:t>
+            </a:r>
+            <a:r>
+              <a:rPr lang="it-IT" b="1" dirty="0"/>
+              <a:t>SSL Certificates</a:t>
+            </a:r>
+            <a:r>
+              <a:rPr lang="it-IT" dirty="0"/>
+              <a:t>.</a:t>
+            </a:r>
+          </a:p>
+          <a:p>
+            <a:r>
+              <a:rPr lang="it-IT" dirty="0"/>
+              <a:t>Clicca sul pulsante a destra </a:t>
+            </a:r>
+            <a:r>
+              <a:rPr lang="it-IT" b="1" dirty="0" err="1"/>
+              <a:t>Add</a:t>
+            </a:r>
+            <a:r>
+              <a:rPr lang="it-IT" b="1" dirty="0"/>
+              <a:t> SSL Certificate</a:t>
+            </a:r>
+            <a:r>
+              <a:rPr lang="it-IT" dirty="0"/>
+              <a:t> (Aggiungi certificato SSL).</a:t>
+            </a:r>
+          </a:p>
+          <a:p>
+            <a:r>
+              <a:rPr lang="it-IT" dirty="0"/>
+              <a:t>Nel menu a tendina che si apre, seleziona </a:t>
+            </a:r>
+            <a:r>
+              <a:rPr lang="it-IT" b="1" dirty="0"/>
+              <a:t>Custom</a:t>
+            </a:r>
+            <a:r>
+              <a:rPr lang="it-IT" dirty="0"/>
+              <a:t> (Personalizzato).</a:t>
+            </a:r>
+          </a:p>
+          <a:p>
+            <a:r>
+              <a:rPr lang="it-IT" dirty="0"/>
+              <a:t>Si aprirà una finestra con dei campi da riempire:</a:t>
+            </a:r>
+          </a:p>
+          <a:p>
+            <a:r>
+              <a:rPr lang="it-IT" b="1" dirty="0"/>
+              <a:t>Name (Nome):</a:t>
+            </a:r>
+            <a:r>
+              <a:rPr lang="it-IT" dirty="0"/>
+              <a:t> Scrivi un nome facile, ad esempio Certificato Locale </a:t>
+            </a:r>
+            <a:r>
+              <a:rPr lang="it-IT" dirty="0" err="1"/>
+              <a:t>Skillfactory</a:t>
+            </a:r>
+            <a:r>
+              <a:rPr lang="it-IT" dirty="0"/>
+              <a:t>.</a:t>
+            </a:r>
+          </a:p>
+          <a:p>
+            <a:r>
+              <a:rPr lang="it-IT" b="1" dirty="0"/>
+              <a:t>Certificate Key (Chiave del certificato):</a:t>
+            </a:r>
+            <a:r>
+              <a:rPr lang="it-IT" dirty="0"/>
+              <a:t> selezioniamo il file </a:t>
+            </a:r>
+            <a:r>
+              <a:rPr lang="it-IT" b="1" dirty="0" err="1"/>
+              <a:t>azienda.key</a:t>
+            </a:r>
+            <a:r>
+              <a:rPr lang="it-IT" dirty="0"/>
+              <a:t>.</a:t>
+            </a:r>
+          </a:p>
+          <a:p>
+            <a:r>
+              <a:rPr lang="it-IT" b="1" dirty="0"/>
+              <a:t>Certificate (Certificato):</a:t>
+            </a:r>
+            <a:r>
+              <a:rPr lang="it-IT" dirty="0"/>
+              <a:t> selezioniamo il file </a:t>
+            </a:r>
+            <a:r>
+              <a:rPr lang="it-IT" b="1" dirty="0"/>
+              <a:t>azienda.crt</a:t>
+            </a:r>
+            <a:r>
+              <a:rPr lang="it-IT" dirty="0"/>
+              <a:t>.</a:t>
+            </a:r>
+          </a:p>
+          <a:p>
+            <a:r>
+              <a:rPr lang="it-IT" dirty="0"/>
+              <a:t>Fatto questo, clicchiamo sul pulsante verde </a:t>
+            </a:r>
+            <a:r>
+              <a:rPr lang="it-IT" b="1" dirty="0"/>
+              <a:t>Save</a:t>
+            </a:r>
+            <a:r>
+              <a:rPr lang="it-IT" dirty="0"/>
+              <a:t> in basso. </a:t>
+            </a:r>
+          </a:p>
+          <a:p>
+            <a:r>
+              <a:rPr lang="it-IT" dirty="0">
+                <a:solidFill>
+                  <a:srgbClr val="171FE2"/>
+                </a:solidFill>
+              </a:rPr>
+              <a:t>Ora NPM ha memorizzato i file di sicurezza.</a:t>
+            </a:r>
+          </a:p>
+        </p:txBody>
+      </p:sp>
+      <p:sp>
+        <p:nvSpPr>
+          <p:cNvPr id="12" name="Segnaposto numero diapositiva 11">
+            <a:extLst>
+              <a:ext uri="{FF2B5EF4-FFF2-40B4-BE49-F238E27FC236}">
+                <a16:creationId xmlns:a16="http://schemas.microsoft.com/office/drawing/2014/main" id="{14B4E893-0BD3-8958-91A0-F6C5BBA03431}"/>
+              </a:ext>
+            </a:extLst>
+          </p:cNvPr>
+          <p:cNvSpPr>
+            <a:spLocks noGrp="1"/>
+          </p:cNvSpPr>
+          <p:nvPr>
+            <p:ph type="sldNum" sz="quarter" idx="12"/>
+          </p:nvPr>
+        </p:nvSpPr>
+        <p:spPr/>
+        <p:txBody>
+          <a:bodyPr/>
+          <a:lstStyle/>
+          <a:p>
+            <a:r>
+              <a:rPr lang="it-IT" dirty="0"/>
+              <a:t>21</a:t>
+            </a:r>
+          </a:p>
+        </p:txBody>
+      </p:sp>
+      <p:pic>
+        <p:nvPicPr>
+          <p:cNvPr id="5" name="Immagine 4">
+            <a:extLst>
+              <a:ext uri="{FF2B5EF4-FFF2-40B4-BE49-F238E27FC236}">
+                <a16:creationId xmlns:a16="http://schemas.microsoft.com/office/drawing/2014/main" id="{08F16E02-39E6-DBD9-0DC4-A1F5E012BEF3}"/>
+              </a:ext>
+            </a:extLst>
+          </p:cNvPr>
+          <p:cNvPicPr>
+            <a:picLocks noChangeAspect="1"/>
+          </p:cNvPicPr>
+          <p:nvPr/>
+        </p:nvPicPr>
+        <p:blipFill>
+          <a:blip r:embed="rId3">
+            <a:extLst>
+              <a:ext uri="{28A0092B-C50C-407E-A947-70E740481C1C}">
+                <a14:useLocalDpi xmlns:a14="http://schemas.microsoft.com/office/drawing/2010/main" val="0"/>
+              </a:ext>
+            </a:extLst>
+          </a:blip>
+          <a:stretch>
+            <a:fillRect/>
+          </a:stretch>
+        </p:blipFill>
+        <p:spPr>
+          <a:xfrm>
+            <a:off x="9083516" y="2521911"/>
+            <a:ext cx="2977451" cy="2379273"/>
+          </a:xfrm>
+          <a:prstGeom prst="rect">
+            <a:avLst/>
+          </a:prstGeom>
+        </p:spPr>
+      </p:pic>
+    </p:spTree>
+    <p:extLst>
+      <p:ext uri="{BB962C8B-B14F-4D97-AF65-F5344CB8AC3E}">
+        <p14:creationId xmlns:p14="http://schemas.microsoft.com/office/powerpoint/2010/main" val="3323388715"/>
+      </p:ext>
+    </p:extLst>
+  </p:cSld>
+  <p:clrMapOvr>
+    <a:masterClrMapping/>
+  </p:clrMapOvr>
+</p:sld>
+</file>
+
+<file path=ppt/slides/slide24.xml><?xml version="1.0" encoding="utf-8"?>
+<p:sld xmlns:a="http://schemas.openxmlformats.org/drawingml/2006/main" xmlns:r="http://schemas.openxmlformats.org/officeDocument/2006/relationships" xmlns:p="http://schemas.openxmlformats.org/presentationml/2006/main">
+  <p:cSld>
+    <p:spTree>
+      <p:nvGrpSpPr>
+        <p:cNvPr id="1" name="">
+          <a:extLst>
+            <a:ext uri="{FF2B5EF4-FFF2-40B4-BE49-F238E27FC236}">
+              <a16:creationId xmlns:a16="http://schemas.microsoft.com/office/drawing/2014/main" id="{7BB0710D-8506-6EEF-07CA-85A6AA4115FD}"/>
+            </a:ext>
+          </a:extLst>
+        </p:cNvPr>
+        <p:cNvGrpSpPr/>
+        <p:nvPr/>
+      </p:nvGrpSpPr>
+      <p:grpSpPr>
+        <a:xfrm>
+          <a:off x="0" y="0"/>
+          <a:ext cx="0" cy="0"/>
+          <a:chOff x="0" y="0"/>
+          <a:chExt cx="0" cy="0"/>
+        </a:xfrm>
+      </p:grpSpPr>
+      <p:sp>
+        <p:nvSpPr>
+          <p:cNvPr id="2" name="Titolo della lezione">
+            <a:extLst>
+              <a:ext uri="{FF2B5EF4-FFF2-40B4-BE49-F238E27FC236}">
+                <a16:creationId xmlns:a16="http://schemas.microsoft.com/office/drawing/2014/main" id="{83A98D03-C688-2492-DAEC-431EB84FCDE6}"/>
+              </a:ext>
+            </a:extLst>
+          </p:cNvPr>
+          <p:cNvSpPr>
+            <a:spLocks noGrp="1"/>
+          </p:cNvSpPr>
+          <p:nvPr>
+            <p:ph type="title"/>
+          </p:nvPr>
+        </p:nvSpPr>
+        <p:spPr>
+          <a:xfrm>
+            <a:off x="838200" y="831206"/>
+            <a:ext cx="10515600" cy="314198"/>
+          </a:xfrm>
+        </p:spPr>
+        <p:txBody>
+          <a:bodyPr/>
+          <a:lstStyle/>
+          <a:p>
+            <a:r>
+              <a:rPr lang="it-IT" dirty="0"/>
+              <a:t>Slide 22: Step 14 – Collegare il certificato SSL al sito</a:t>
+            </a:r>
+          </a:p>
+        </p:txBody>
+      </p:sp>
+      <p:sp>
+        <p:nvSpPr>
+          <p:cNvPr id="3" name="Contenuto della lezione">
+            <a:extLst>
+              <a:ext uri="{FF2B5EF4-FFF2-40B4-BE49-F238E27FC236}">
+                <a16:creationId xmlns:a16="http://schemas.microsoft.com/office/drawing/2014/main" id="{C0448354-0A30-6959-2B11-CB6A741747AD}"/>
+              </a:ext>
+            </a:extLst>
+          </p:cNvPr>
+          <p:cNvSpPr>
+            <a:spLocks noGrp="1"/>
+          </p:cNvSpPr>
+          <p:nvPr>
+            <p:ph idx="1"/>
+          </p:nvPr>
+        </p:nvSpPr>
+        <p:spPr>
+          <a:xfrm>
+            <a:off x="838201" y="1261008"/>
+            <a:ext cx="10515599" cy="4803369"/>
+          </a:xfrm>
+        </p:spPr>
+        <p:txBody>
+          <a:bodyPr/>
+          <a:lstStyle/>
+          <a:p>
+            <a:r>
+              <a:rPr lang="it-IT" dirty="0"/>
+              <a:t>Ora dobbiamo dire a NPM di usare questo specifico certificato quando qualcuno digita il dominio.</a:t>
+            </a:r>
+          </a:p>
+          <a:p>
+            <a:r>
+              <a:rPr lang="it-IT" dirty="0"/>
+              <a:t>Torniamo nella scheda principale cliccando su </a:t>
+            </a:r>
+            <a:r>
+              <a:rPr lang="it-IT" b="1" dirty="0" err="1"/>
+              <a:t>Hosts</a:t>
+            </a:r>
+            <a:r>
+              <a:rPr lang="it-IT" dirty="0"/>
+              <a:t> -&gt; </a:t>
+            </a:r>
+            <a:r>
+              <a:rPr lang="it-IT" b="1" dirty="0"/>
+              <a:t>Proxy </a:t>
+            </a:r>
+            <a:r>
+              <a:rPr lang="it-IT" b="1" dirty="0" err="1"/>
+              <a:t>Hosts</a:t>
+            </a:r>
+            <a:r>
+              <a:rPr lang="it-IT" dirty="0"/>
+              <a:t>.</a:t>
+            </a:r>
+          </a:p>
+          <a:p>
+            <a:r>
+              <a:rPr lang="it-IT" dirty="0"/>
+              <a:t>Editiamo la riga </a:t>
+            </a:r>
+            <a:r>
+              <a:rPr lang="it-IT" dirty="0" err="1"/>
+              <a:t>azienda.skillfactory.local</a:t>
+            </a:r>
+            <a:r>
+              <a:rPr lang="it-IT" dirty="0"/>
+              <a:t> (clicchiamo sui 3 puntini verticali). </a:t>
+            </a:r>
+          </a:p>
+          <a:p>
+            <a:r>
+              <a:rPr lang="it-IT" dirty="0"/>
+              <a:t>Clicchiamo sulla terza scheda in alto, quella chiamata </a:t>
+            </a:r>
+            <a:r>
+              <a:rPr lang="it-IT" b="1" dirty="0"/>
+              <a:t>SSL</a:t>
+            </a:r>
+            <a:r>
+              <a:rPr lang="it-IT" dirty="0"/>
+              <a:t>.</a:t>
+            </a:r>
+          </a:p>
+          <a:p>
+            <a:r>
+              <a:rPr lang="it-IT" dirty="0"/>
+              <a:t>Sotto la voce </a:t>
+            </a:r>
+            <a:r>
+              <a:rPr lang="it-IT" i="1" dirty="0"/>
+              <a:t>SSL Certificate</a:t>
+            </a:r>
+            <a:r>
+              <a:rPr lang="it-IT" dirty="0"/>
+              <a:t>, vedrai un menu a tendina con scritto </a:t>
+            </a:r>
+            <a:r>
+              <a:rPr lang="it-IT" i="1" dirty="0"/>
+              <a:t>None</a:t>
+            </a:r>
+            <a:r>
+              <a:rPr lang="it-IT" dirty="0"/>
+              <a:t>. Cliccaci sopra e seleziona il certificato che hai appena caricato (Certificato Locale </a:t>
+            </a:r>
+            <a:r>
+              <a:rPr lang="it-IT" dirty="0" err="1"/>
+              <a:t>Skillfactory</a:t>
+            </a:r>
+            <a:r>
+              <a:rPr lang="it-IT" dirty="0"/>
+              <a:t>).</a:t>
+            </a:r>
+          </a:p>
+          <a:p>
+            <a:endParaRPr lang="it-IT" dirty="0"/>
+          </a:p>
+          <a:p>
+            <a:endParaRPr lang="it-IT" dirty="0"/>
+          </a:p>
+          <a:p>
+            <a:endParaRPr lang="it-IT" dirty="0"/>
+          </a:p>
+          <a:p>
+            <a:endParaRPr lang="it-IT" dirty="0"/>
+          </a:p>
+          <a:p>
+            <a:endParaRPr lang="it-IT" dirty="0">
+              <a:solidFill>
+                <a:srgbClr val="171FE2"/>
+              </a:solidFill>
+            </a:endParaRPr>
+          </a:p>
+        </p:txBody>
+      </p:sp>
+      <p:sp>
+        <p:nvSpPr>
+          <p:cNvPr id="12" name="Segnaposto numero diapositiva 11">
+            <a:extLst>
+              <a:ext uri="{FF2B5EF4-FFF2-40B4-BE49-F238E27FC236}">
+                <a16:creationId xmlns:a16="http://schemas.microsoft.com/office/drawing/2014/main" id="{8F2B2254-7F36-4C04-D259-D5A6F1BC5AA8}"/>
+              </a:ext>
+            </a:extLst>
+          </p:cNvPr>
+          <p:cNvSpPr>
+            <a:spLocks noGrp="1"/>
+          </p:cNvSpPr>
+          <p:nvPr>
+            <p:ph type="sldNum" sz="quarter" idx="12"/>
+          </p:nvPr>
+        </p:nvSpPr>
+        <p:spPr/>
+        <p:txBody>
+          <a:bodyPr/>
+          <a:lstStyle/>
+          <a:p>
+            <a:r>
+              <a:rPr lang="it-IT" dirty="0"/>
+              <a:t>22</a:t>
+            </a:r>
+          </a:p>
+        </p:txBody>
+      </p:sp>
+      <p:pic>
+        <p:nvPicPr>
+          <p:cNvPr id="6" name="Immagine 5">
+            <a:extLst>
+              <a:ext uri="{FF2B5EF4-FFF2-40B4-BE49-F238E27FC236}">
+                <a16:creationId xmlns:a16="http://schemas.microsoft.com/office/drawing/2014/main" id="{3437E22D-23C0-21EC-BE27-0CB6CCCB36FF}"/>
+              </a:ext>
+            </a:extLst>
+          </p:cNvPr>
+          <p:cNvPicPr>
+            <a:picLocks noChangeAspect="1"/>
+          </p:cNvPicPr>
+          <p:nvPr/>
+        </p:nvPicPr>
+        <p:blipFill>
+          <a:blip r:embed="rId3">
+            <a:extLst>
+              <a:ext uri="{28A0092B-C50C-407E-A947-70E740481C1C}">
+                <a14:useLocalDpi xmlns:a14="http://schemas.microsoft.com/office/drawing/2010/main" val="0"/>
+              </a:ext>
+            </a:extLst>
+          </a:blip>
+          <a:stretch>
+            <a:fillRect/>
+          </a:stretch>
+        </p:blipFill>
+        <p:spPr>
+          <a:xfrm>
+            <a:off x="838200" y="3445292"/>
+            <a:ext cx="4757928" cy="3412708"/>
+          </a:xfrm>
+          <a:prstGeom prst="rect">
+            <a:avLst/>
+          </a:prstGeom>
+        </p:spPr>
+      </p:pic>
+      <p:sp>
+        <p:nvSpPr>
+          <p:cNvPr id="7" name="CasellaDiTesto 6">
+            <a:extLst>
+              <a:ext uri="{FF2B5EF4-FFF2-40B4-BE49-F238E27FC236}">
+                <a16:creationId xmlns:a16="http://schemas.microsoft.com/office/drawing/2014/main" id="{6AE88741-5028-CD9D-2DB8-FEA5B3524479}"/>
+              </a:ext>
+            </a:extLst>
+          </p:cNvPr>
+          <p:cNvSpPr txBox="1"/>
+          <p:nvPr/>
+        </p:nvSpPr>
+        <p:spPr>
+          <a:xfrm>
+            <a:off x="6096000" y="4272468"/>
+            <a:ext cx="5339347" cy="2308324"/>
+          </a:xfrm>
+          <a:prstGeom prst="rect">
+            <a:avLst/>
+          </a:prstGeom>
+          <a:noFill/>
+        </p:spPr>
+        <p:txBody>
+          <a:bodyPr wrap="none" rtlCol="0">
+            <a:spAutoFit/>
+          </a:bodyPr>
+          <a:lstStyle/>
+          <a:p>
+            <a:r>
+              <a:rPr lang="it-IT" dirty="0"/>
+              <a:t>Accendiamo (facciamo diventare verde) </a:t>
+            </a:r>
+          </a:p>
+          <a:p>
+            <a:r>
+              <a:rPr lang="it-IT" dirty="0"/>
+              <a:t>l'interruttore con scritto </a:t>
+            </a:r>
+            <a:r>
+              <a:rPr lang="it-IT" b="1" dirty="0"/>
+              <a:t>Force SSL</a:t>
+            </a:r>
+            <a:r>
+              <a:rPr lang="it-IT" dirty="0"/>
+              <a:t>. </a:t>
+            </a:r>
+          </a:p>
+          <a:p>
+            <a:endParaRPr lang="it-IT" dirty="0"/>
+          </a:p>
+          <a:p>
+            <a:r>
+              <a:rPr lang="it-IT" dirty="0">
+                <a:solidFill>
+                  <a:srgbClr val="171FE2"/>
+                </a:solidFill>
+              </a:rPr>
+              <a:t>Questo interruttore serve a fare in modo che scrivendo</a:t>
+            </a:r>
+          </a:p>
+          <a:p>
+            <a:r>
+              <a:rPr lang="it-IT" dirty="0">
+                <a:solidFill>
+                  <a:srgbClr val="171FE2"/>
+                </a:solidFill>
+              </a:rPr>
+              <a:t>http://, il proxy ci sposta da solo su https://</a:t>
+            </a:r>
+            <a:r>
+              <a:rPr lang="it-IT" dirty="0"/>
+              <a:t>.</a:t>
+            </a:r>
+          </a:p>
+          <a:p>
+            <a:endParaRPr lang="it-IT" dirty="0"/>
+          </a:p>
+          <a:p>
+            <a:r>
+              <a:rPr lang="it-IT" dirty="0"/>
+              <a:t>Clicchiamo su </a:t>
+            </a:r>
+            <a:r>
+              <a:rPr lang="it-IT" b="1" dirty="0"/>
+              <a:t>Save</a:t>
+            </a:r>
+            <a:r>
+              <a:rPr lang="it-IT" dirty="0"/>
+              <a:t>.</a:t>
+            </a:r>
+          </a:p>
+          <a:p>
+            <a:endParaRPr lang="it-IT" dirty="0"/>
+          </a:p>
+        </p:txBody>
+      </p:sp>
+    </p:spTree>
+    <p:extLst>
+      <p:ext uri="{BB962C8B-B14F-4D97-AF65-F5344CB8AC3E}">
+        <p14:creationId xmlns:p14="http://schemas.microsoft.com/office/powerpoint/2010/main" val="2972816568"/>
+      </p:ext>
+    </p:extLst>
+  </p:cSld>
+  <p:clrMapOvr>
+    <a:masterClrMapping/>
+  </p:clrMapOvr>
+</p:sld>
+</file>
+
+<file path=ppt/slides/slide25.xml><?xml version="1.0" encoding="utf-8"?>
+<p:sld xmlns:a="http://schemas.openxmlformats.org/drawingml/2006/main" xmlns:r="http://schemas.openxmlformats.org/officeDocument/2006/relationships" xmlns:p="http://schemas.openxmlformats.org/presentationml/2006/main">
+  <p:cSld>
+    <p:spTree>
+      <p:nvGrpSpPr>
+        <p:cNvPr id="1" name="">
+          <a:extLst>
+            <a:ext uri="{FF2B5EF4-FFF2-40B4-BE49-F238E27FC236}">
+              <a16:creationId xmlns:a16="http://schemas.microsoft.com/office/drawing/2014/main" id="{2EA1E9AB-778D-D5F1-A7CD-9927E3ADE8D2}"/>
+            </a:ext>
+          </a:extLst>
+        </p:cNvPr>
+        <p:cNvGrpSpPr/>
+        <p:nvPr/>
+      </p:nvGrpSpPr>
+      <p:grpSpPr>
+        <a:xfrm>
+          <a:off x="0" y="0"/>
+          <a:ext cx="0" cy="0"/>
+          <a:chOff x="0" y="0"/>
+          <a:chExt cx="0" cy="0"/>
+        </a:xfrm>
+      </p:grpSpPr>
+      <p:sp>
+        <p:nvSpPr>
+          <p:cNvPr id="2" name="Titolo della lezione">
+            <a:extLst>
+              <a:ext uri="{FF2B5EF4-FFF2-40B4-BE49-F238E27FC236}">
+                <a16:creationId xmlns:a16="http://schemas.microsoft.com/office/drawing/2014/main" id="{CABAC1BF-1A36-9B7B-A651-D501BE76E3D5}"/>
+              </a:ext>
+            </a:extLst>
+          </p:cNvPr>
+          <p:cNvSpPr>
+            <a:spLocks noGrp="1"/>
+          </p:cNvSpPr>
+          <p:nvPr>
+            <p:ph type="title"/>
+          </p:nvPr>
+        </p:nvSpPr>
+        <p:spPr>
+          <a:xfrm>
+            <a:off x="838200" y="831206"/>
+            <a:ext cx="10515600" cy="314198"/>
+          </a:xfrm>
+        </p:spPr>
+        <p:txBody>
+          <a:bodyPr/>
+          <a:lstStyle/>
+          <a:p>
+            <a:r>
+              <a:rPr lang="it-IT" dirty="0"/>
+              <a:t>Slide 23: Rinnovo automatico del certificato</a:t>
+            </a:r>
+          </a:p>
+        </p:txBody>
+      </p:sp>
+      <p:sp>
+        <p:nvSpPr>
+          <p:cNvPr id="3" name="Contenuto della lezione">
+            <a:extLst>
+              <a:ext uri="{FF2B5EF4-FFF2-40B4-BE49-F238E27FC236}">
+                <a16:creationId xmlns:a16="http://schemas.microsoft.com/office/drawing/2014/main" id="{8936E18C-4C69-F016-3C79-7EF7D8D59A93}"/>
+              </a:ext>
+            </a:extLst>
+          </p:cNvPr>
+          <p:cNvSpPr>
+            <a:spLocks noGrp="1"/>
+          </p:cNvSpPr>
+          <p:nvPr>
+            <p:ph idx="1"/>
+          </p:nvPr>
+        </p:nvSpPr>
+        <p:spPr>
+          <a:xfrm>
+            <a:off x="838201" y="1261008"/>
+            <a:ext cx="10515599" cy="4803369"/>
+          </a:xfrm>
+        </p:spPr>
+        <p:txBody>
+          <a:bodyPr/>
+          <a:lstStyle/>
+          <a:p>
+            <a:r>
+              <a:rPr lang="it-IT" dirty="0"/>
+              <a:t>Nel mondo reale (in produzione), il rinnovo automatico si imposta con un click perché </a:t>
+            </a:r>
+            <a:r>
+              <a:rPr lang="it-IT" dirty="0" err="1"/>
+              <a:t>Nginx</a:t>
+            </a:r>
+            <a:r>
+              <a:rPr lang="it-IT" dirty="0"/>
+              <a:t> Proxy Manager parla direttamente con i server di </a:t>
+            </a:r>
+            <a:r>
+              <a:rPr lang="it-IT" b="1" dirty="0" err="1"/>
+              <a:t>Let's</a:t>
+            </a:r>
+            <a:r>
+              <a:rPr lang="it-IT" b="1" dirty="0"/>
+              <a:t> </a:t>
+            </a:r>
+            <a:r>
+              <a:rPr lang="it-IT" b="1" dirty="0" err="1"/>
+              <a:t>Encrypt</a:t>
+            </a:r>
+            <a:r>
+              <a:rPr lang="it-IT" dirty="0"/>
+              <a:t>. </a:t>
+            </a:r>
+          </a:p>
+          <a:p>
+            <a:r>
+              <a:rPr lang="it-IT" dirty="0"/>
+              <a:t>Ogni 90 giorni, NPM bussa a internet, dimostra di essere il vero proprietario del dominio e scarica il rinnovo da solo.</a:t>
+            </a:r>
+          </a:p>
+          <a:p>
+            <a:r>
+              <a:rPr lang="it-IT" dirty="0"/>
+              <a:t>Nel nostro caso, invece:</a:t>
+            </a:r>
+          </a:p>
+          <a:p>
+            <a:r>
+              <a:rPr lang="it-IT" dirty="0"/>
+              <a:t>Il dominio </a:t>
+            </a:r>
+            <a:r>
+              <a:rPr lang="it-IT" dirty="0" err="1"/>
+              <a:t>azienda.skillfactory.local</a:t>
+            </a:r>
+            <a:r>
+              <a:rPr lang="it-IT" dirty="0"/>
+              <a:t> esiste </a:t>
+            </a:r>
+            <a:r>
+              <a:rPr lang="it-IT" b="1" dirty="0"/>
+              <a:t>solo dentro il  PC</a:t>
+            </a:r>
+            <a:r>
+              <a:rPr lang="it-IT" dirty="0"/>
+              <a:t> (grazie al file </a:t>
+            </a:r>
+            <a:r>
+              <a:rPr lang="it-IT" dirty="0" err="1"/>
+              <a:t>hosts</a:t>
+            </a:r>
+            <a:r>
+              <a:rPr lang="it-IT" dirty="0"/>
+              <a:t>).</a:t>
+            </a:r>
+          </a:p>
+          <a:p>
+            <a:r>
+              <a:rPr lang="it-IT" dirty="0">
+                <a:solidFill>
+                  <a:srgbClr val="171FE2"/>
+                </a:solidFill>
+              </a:rPr>
+              <a:t>Il certificato non arriva da internet, ma lo abbiamo fabbricato a mano con il comando </a:t>
+            </a:r>
+            <a:r>
+              <a:rPr lang="it-IT" dirty="0" err="1">
+                <a:solidFill>
+                  <a:srgbClr val="171FE2"/>
+                </a:solidFill>
+              </a:rPr>
+              <a:t>openssl</a:t>
+            </a:r>
+            <a:r>
+              <a:rPr lang="it-IT" dirty="0">
+                <a:solidFill>
+                  <a:srgbClr val="171FE2"/>
+                </a:solidFill>
+              </a:rPr>
+              <a:t>.</a:t>
+            </a:r>
+          </a:p>
+          <a:p>
+            <a:r>
+              <a:rPr lang="it-IT" dirty="0" err="1"/>
+              <a:t>Nginx</a:t>
+            </a:r>
+            <a:r>
+              <a:rPr lang="it-IT" dirty="0"/>
+              <a:t> Proxy Manager non ha nessun server esterno a cui appoggiarsi per chiedere un aggiornamento automatico, perché quei file .</a:t>
+            </a:r>
+            <a:r>
+              <a:rPr lang="it-IT" dirty="0" err="1"/>
+              <a:t>crt</a:t>
+            </a:r>
+            <a:r>
+              <a:rPr lang="it-IT" dirty="0"/>
+              <a:t> e .key li abbiamo caricati come file statici ("Custom").</a:t>
+            </a:r>
+          </a:p>
+          <a:p>
+            <a:endParaRPr lang="it-IT" dirty="0"/>
+          </a:p>
+          <a:p>
+            <a:endParaRPr lang="it-IT" dirty="0"/>
+          </a:p>
+          <a:p>
+            <a:endParaRPr lang="it-IT" dirty="0"/>
+          </a:p>
+          <a:p>
+            <a:endParaRPr lang="it-IT" dirty="0"/>
+          </a:p>
+          <a:p>
+            <a:endParaRPr lang="it-IT" dirty="0">
+              <a:solidFill>
+                <a:srgbClr val="171FE2"/>
+              </a:solidFill>
+            </a:endParaRPr>
+          </a:p>
+        </p:txBody>
+      </p:sp>
+      <p:sp>
+        <p:nvSpPr>
+          <p:cNvPr id="12" name="Segnaposto numero diapositiva 11">
+            <a:extLst>
+              <a:ext uri="{FF2B5EF4-FFF2-40B4-BE49-F238E27FC236}">
+                <a16:creationId xmlns:a16="http://schemas.microsoft.com/office/drawing/2014/main" id="{3F90B2F1-E9C2-B963-7814-A9D57A78DF49}"/>
+              </a:ext>
+            </a:extLst>
+          </p:cNvPr>
+          <p:cNvSpPr>
+            <a:spLocks noGrp="1"/>
+          </p:cNvSpPr>
+          <p:nvPr>
+            <p:ph type="sldNum" sz="quarter" idx="12"/>
+          </p:nvPr>
+        </p:nvSpPr>
+        <p:spPr/>
+        <p:txBody>
+          <a:bodyPr/>
+          <a:lstStyle/>
+          <a:p>
+            <a:r>
+              <a:rPr lang="it-IT" dirty="0"/>
+              <a:t>23</a:t>
+            </a:r>
+          </a:p>
+        </p:txBody>
+      </p:sp>
+    </p:spTree>
+    <p:extLst>
+      <p:ext uri="{BB962C8B-B14F-4D97-AF65-F5344CB8AC3E}">
+        <p14:creationId xmlns:p14="http://schemas.microsoft.com/office/powerpoint/2010/main" val="2509516484"/>
+      </p:ext>
+    </p:extLst>
+  </p:cSld>
+  <p:clrMapOvr>
+    <a:masterClrMapping/>
+  </p:clrMapOvr>
+</p:sld>
+</file>
+
+<file path=ppt/slides/slide26.xml><?xml version="1.0" encoding="utf-8"?>
+<p:sld xmlns:a="http://schemas.openxmlformats.org/drawingml/2006/main" xmlns:r="http://schemas.openxmlformats.org/officeDocument/2006/relationships" xmlns:p="http://schemas.openxmlformats.org/presentationml/2006/main">
+  <p:cSld>
+    <p:spTree>
+      <p:nvGrpSpPr>
+        <p:cNvPr id="1" name=""/>
+        <p:cNvGrpSpPr/>
+        <p:nvPr/>
+      </p:nvGrpSpPr>
+      <p:grpSpPr>
+        <a:xfrm>
+          <a:off x="0" y="0"/>
+          <a:ext cx="0" cy="0"/>
+          <a:chOff x="0" y="0"/>
+          <a:chExt cx="0" cy="0"/>
+        </a:xfrm>
+      </p:grpSpPr>
+      <p:sp>
+        <p:nvSpPr>
+          <p:cNvPr id="2" name="Titolo 1">
+            <a:extLst>
+              <a:ext uri="{FF2B5EF4-FFF2-40B4-BE49-F238E27FC236}">
+                <a16:creationId xmlns:a16="http://schemas.microsoft.com/office/drawing/2014/main" id="{B5E02355-4941-9C10-CA1D-649F04DB5143}"/>
+              </a:ext>
+            </a:extLst>
+          </p:cNvPr>
+          <p:cNvSpPr>
+            <a:spLocks noGrp="1"/>
+          </p:cNvSpPr>
+          <p:nvPr>
+            <p:ph type="title"/>
+          </p:nvPr>
+        </p:nvSpPr>
+        <p:spPr/>
+        <p:txBody>
+          <a:bodyPr/>
+          <a:lstStyle/>
+          <a:p>
+            <a:r>
+              <a:rPr lang="it-IT" spc="0" dirty="0">
+                <a:latin typeface="Neue Haas Grotesk Text Pro" panose="020B0504020202020204" pitchFamily="34" charset="0"/>
+              </a:rPr>
+              <a:t>GRAZIE PER L’ATTENZIONE</a:t>
+            </a:r>
+          </a:p>
+        </p:txBody>
+      </p:sp>
+    </p:spTree>
+    <p:extLst>
+      <p:ext uri="{BB962C8B-B14F-4D97-AF65-F5344CB8AC3E}">
+        <p14:creationId xmlns:p14="http://schemas.microsoft.com/office/powerpoint/2010/main" val="3003246572"/>
       </p:ext>
     </p:extLst>
   </p:cSld>
@@ -10499,6 +13855,27 @@
 </file>
 
 <file path=customXml/item1.xml><?xml version="1.0" encoding="utf-8"?>
+<p:properties xmlns:p="http://schemas.microsoft.com/office/2006/metadata/properties" xmlns:xsi="http://www.w3.org/2001/XMLSchema-instance" xmlns:pc="http://schemas.microsoft.com/office/infopath/2007/PartnerControls">
+  <documentManagement>
+    <TaxCatchAll xmlns="21b72fd8-e7d0-49ac-9795-d1b0bc6b7e1c" xsi:nil="true"/>
+    <lcf76f155ced4ddcb4097134ff3c332f xmlns="8b3acf13-3a58-43b2-a29e-f23503de136d">
+      <Terms xmlns="http://schemas.microsoft.com/office/infopath/2007/PartnerControls"/>
+    </lcf76f155ced4ddcb4097134ff3c332f>
+    <Argomento xmlns="8b3acf13-3a58-43b2-a29e-f23503de136d" xsi:nil="true"/>
+  </documentManagement>
+</p:properties>
+</file>
+
+<file path=customXml/item2.xml><?xml version="1.0" encoding="utf-8"?>
+<?mso-contentType ?>
+<FormTemplates xmlns="http://schemas.microsoft.com/sharepoint/v3/contenttype/forms">
+  <Display>DocumentLibraryForm</Display>
+  <Edit>DocumentLibraryForm</Edit>
+  <New>DocumentLibraryForm</New>
+</FormTemplates>
+</file>
+
+<file path=customXml/item3.xml><?xml version="1.0" encoding="utf-8"?>
 <ct:contentTypeSchema xmlns:ct="http://schemas.microsoft.com/office/2006/metadata/contentType" xmlns:ma="http://schemas.microsoft.com/office/2006/metadata/properties/metaAttributes" ct:_="" ma:_="" ma:contentTypeName="Document" ma:contentTypeID="0x010100D3455C6CD0B9BF4DB2CA3009677D9668" ma:contentTypeVersion="17" ma:contentTypeDescription="Create a new document." ma:contentTypeScope="" ma:versionID="6361f2605a906a42d9630ca59d277a8b">
   <xsd:schema xmlns:xsd="http://www.w3.org/2001/XMLSchema" xmlns:xs="http://www.w3.org/2001/XMLSchema" xmlns:p="http://schemas.microsoft.com/office/2006/metadata/properties" xmlns:ns2="8b3acf13-3a58-43b2-a29e-f23503de136d" xmlns:ns3="21b72fd8-e7d0-49ac-9795-d1b0bc6b7e1c" targetNamespace="http://schemas.microsoft.com/office/2006/metadata/properties" ma:root="true" ma:fieldsID="ae4eb9e2c998b5efed80ec6126f835fa" ns2:_="" ns3:_="">
     <xsd:import namespace="8b3acf13-3a58-43b2-a29e-f23503de136d"/>
@@ -10749,28 +14126,26 @@
 </ct:contentTypeSchema>
 </file>
 
-<file path=customXml/item2.xml><?xml version="1.0" encoding="utf-8"?>
-<?mso-contentType ?>
-<FormTemplates xmlns="http://schemas.microsoft.com/sharepoint/v3/contenttype/forms">
-  <Display>DocumentLibraryForm</Display>
-  <Edit>DocumentLibraryForm</Edit>
-  <New>DocumentLibraryForm</New>
-</FormTemplates>
+<file path=customXml/itemProps1.xml><?xml version="1.0" encoding="utf-8"?>
+<ds:datastoreItem xmlns:ds="http://schemas.openxmlformats.org/officeDocument/2006/customXml" ds:itemID="{6766878A-54ED-4867-B478-72A29DC19B89}">
+  <ds:schemaRefs>
+    <ds:schemaRef ds:uri="http://schemas.microsoft.com/office/2006/metadata/properties"/>
+    <ds:schemaRef ds:uri="http://schemas.microsoft.com/office/infopath/2007/PartnerControls"/>
+    <ds:schemaRef ds:uri="21b72fd8-e7d0-49ac-9795-d1b0bc6b7e1c"/>
+    <ds:schemaRef ds:uri="8b3acf13-3a58-43b2-a29e-f23503de136d"/>
+  </ds:schemaRefs>
+</ds:datastoreItem>
 </file>
 
-<file path=customXml/item3.xml><?xml version="1.0" encoding="utf-8"?>
-<p:properties xmlns:p="http://schemas.microsoft.com/office/2006/metadata/properties" xmlns:xsi="http://www.w3.org/2001/XMLSchema-instance" xmlns:pc="http://schemas.microsoft.com/office/infopath/2007/PartnerControls">
-  <documentManagement>
-    <TaxCatchAll xmlns="21b72fd8-e7d0-49ac-9795-d1b0bc6b7e1c" xsi:nil="true"/>
-    <lcf76f155ced4ddcb4097134ff3c332f xmlns="8b3acf13-3a58-43b2-a29e-f23503de136d">
-      <Terms xmlns="http://schemas.microsoft.com/office/infopath/2007/PartnerControls"/>
-    </lcf76f155ced4ddcb4097134ff3c332f>
-    <Argomento xmlns="8b3acf13-3a58-43b2-a29e-f23503de136d" xsi:nil="true"/>
-  </documentManagement>
-</p:properties>
+<file path=customXml/itemProps2.xml><?xml version="1.0" encoding="utf-8"?>
+<ds:datastoreItem xmlns:ds="http://schemas.openxmlformats.org/officeDocument/2006/customXml" ds:itemID="{67C65656-B2D8-4C19-A873-091B25A5212E}">
+  <ds:schemaRefs>
+    <ds:schemaRef ds:uri="http://schemas.microsoft.com/sharepoint/v3/contenttype/forms"/>
+  </ds:schemaRefs>
+</ds:datastoreItem>
 </file>
 
-<file path=customXml/itemProps1.xml><?xml version="1.0" encoding="utf-8"?>
+<file path=customXml/itemProps3.xml><?xml version="1.0" encoding="utf-8"?>
 <ds:datastoreItem xmlns:ds="http://schemas.openxmlformats.org/officeDocument/2006/customXml" ds:itemID="{70468F63-B318-4D5F-A1DF-86BE98AC2293}">
   <ds:schemaRefs>
     <ds:schemaRef ds:uri="http://schemas.microsoft.com/office/2006/metadata/contentType"/>
@@ -10787,23 +14162,4 @@
     <ds:schemaRef ds:uri="http://schemas.microsoft.com/internal/obd"/>
   </ds:schemaRefs>
 </ds:datastoreItem>
-</file>
-
-<file path=customXml/itemProps2.xml><?xml version="1.0" encoding="utf-8"?>
-<ds:datastoreItem xmlns:ds="http://schemas.openxmlformats.org/officeDocument/2006/customXml" ds:itemID="{67C65656-B2D8-4C19-A873-091B25A5212E}">
-  <ds:schemaRefs>
-    <ds:schemaRef ds:uri="http://schemas.microsoft.com/sharepoint/v3/contenttype/forms"/>
-  </ds:schemaRefs>
-</ds:datastoreItem>
-</file>
-
-<file path=customXml/itemProps3.xml><?xml version="1.0" encoding="utf-8"?>
-<ds:datastoreItem xmlns:ds="http://schemas.openxmlformats.org/officeDocument/2006/customXml" ds:itemID="{6766878A-54ED-4867-B478-72A29DC19B89}">
-  <ds:schemaRefs>
-    <ds:schemaRef ds:uri="http://schemas.microsoft.com/office/2006/metadata/properties"/>
-    <ds:schemaRef ds:uri="http://schemas.microsoft.com/office/infopath/2007/PartnerControls"/>
-    <ds:schemaRef ds:uri="21b72fd8-e7d0-49ac-9795-d1b0bc6b7e1c"/>
-    <ds:schemaRef ds:uri="8b3acf13-3a58-43b2-a29e-f23503de136d"/>
-  </ds:schemaRefs>
-</ds:datastoreItem>
 </file>